--- a/exports/pptx/lessons/middle-module-03-ayurveda-good-health/day-04-dinacharya.pptx
+++ b/exports/pptx/lessons/middle-module-03-ayurveda-good-health/day-04-dinacharya.pptx
@@ -17,9 +17,15 @@
     <p:sldId id="265" r:id="rId11"/>
     <p:sldId id="266" r:id="rId12"/>
     <p:sldId id="267" r:id="rId13"/>
+    <p:sldId id="268" r:id="rId14"/>
+    <p:sldId id="269" r:id="rId15"/>
+    <p:sldId id="270" r:id="rId16"/>
+    <p:sldId id="271" r:id="rId17"/>
+    <p:sldId id="272" r:id="rId18"/>
+    <p:sldId id="273" r:id="rId19"/>
   </p:sldIdLst>
   <p:notesMasterIdLst>
-    <p:notesMasterId r:id="rId14"/>
+    <p:notesMasterId r:id="rId20"/>
   </p:notesMasterIdLst>
   <p:sldSz cx="9144000" cy="5143500"/>
   <p:notesSz cx="5143500" cy="9144000"/>
@@ -801,6 +807,534 @@
             <a:fld id="{F7021451-1387-4CA6-816F-3879F97B5CBC}" type="slidenum">
               <a:rPr lang="en-US"/>
               <a:t>12</a:t>
+            </a:fld>
+            <a:endParaRPr lang="en-US"/>
+          </a:p>
+        </p:txBody>
+      </p:sp>
+    </p:spTree>
+    <p:extLst>
+      <p:ext uri="{BB962C8B-B14F-4D97-AF65-F5344CB8AC3E}">
+        <p14:creationId xmlns:p14="http://schemas.microsoft.com/office/powerpoint/2010/main" val="1024086991"/>
+      </p:ext>
+    </p:extLst>
+  </p:cSld>
+  <p:clrMapOvr>
+    <a:masterClrMapping/>
+  </p:clrMapOvr>
+</p:notes>
+</file>
+
+<file path=ppt/notesSlides/notesSlide13.xml><?xml version="1.0" encoding="utf-8"?>
+<p:notes xmlns:a="http://schemas.openxmlformats.org/drawingml/2006/main" xmlns:r="http://schemas.openxmlformats.org/officeDocument/2006/relationships" xmlns:p="http://schemas.openxmlformats.org/presentationml/2006/main">
+  <p:cSld>
+    <p:spTree>
+      <p:nvGrpSpPr>
+        <p:cNvPr id="1" name=""/>
+        <p:cNvGrpSpPr/>
+        <p:nvPr/>
+      </p:nvGrpSpPr>
+      <p:grpSpPr>
+        <a:xfrm>
+          <a:off x="0" y="0"/>
+          <a:ext cx="0" cy="0"/>
+          <a:chOff x="0" y="0"/>
+          <a:chExt cx="0" cy="0"/>
+        </a:xfrm>
+      </p:grpSpPr>
+      <p:sp>
+        <p:nvSpPr>
+          <p:cNvPr id="2" name="Slide Image Placeholder 1"/>
+          <p:cNvSpPr>
+            <a:spLocks noGrp="1" noRot="1" noChangeAspect="1"/>
+          </p:cNvSpPr>
+          <p:nvPr>
+            <p:ph type="sldImg"/>
+          </p:nvPr>
+        </p:nvSpPr>
+        <p:spPr/>
+      </p:sp>
+      <p:sp>
+        <p:nvSpPr>
+          <p:cNvPr id="3" name="Notes Placeholder 2"/>
+          <p:cNvSpPr>
+            <a:spLocks noGrp="1"/>
+          </p:cNvSpPr>
+          <p:nvPr>
+            <p:ph type="body" idx="1"/>
+          </p:nvPr>
+        </p:nvSpPr>
+        <p:spPr/>
+        <p:txBody>
+          <a:bodyPr/>
+          <a:lstStyle/>
+          <a:p>
+            <a:r>
+              <a:rPr lang="en-US" dirty="0"/>
+              <a:t/>
+            </a:r>
+            <a:endParaRPr lang="en-US" dirty="0"/>
+          </a:p>
+        </p:txBody>
+      </p:sp>
+      <p:sp>
+        <p:nvSpPr>
+          <p:cNvPr id="4" name="Slide Number Placeholder 3"/>
+          <p:cNvSpPr>
+            <a:spLocks noGrp="1"/>
+          </p:cNvSpPr>
+          <p:nvPr>
+            <p:ph type="sldNum" sz="quarter" idx="10"/>
+          </p:nvPr>
+        </p:nvSpPr>
+        <p:spPr/>
+        <p:txBody>
+          <a:bodyPr/>
+          <a:lstStyle/>
+          <a:p>
+            <a:fld id="{F7021451-1387-4CA6-816F-3879F97B5CBC}" type="slidenum">
+              <a:rPr lang="en-US"/>
+              <a:t>13</a:t>
+            </a:fld>
+            <a:endParaRPr lang="en-US"/>
+          </a:p>
+        </p:txBody>
+      </p:sp>
+    </p:spTree>
+    <p:extLst>
+      <p:ext uri="{BB962C8B-B14F-4D97-AF65-F5344CB8AC3E}">
+        <p14:creationId xmlns:p14="http://schemas.microsoft.com/office/powerpoint/2010/main" val="1024086991"/>
+      </p:ext>
+    </p:extLst>
+  </p:cSld>
+  <p:clrMapOvr>
+    <a:masterClrMapping/>
+  </p:clrMapOvr>
+</p:notes>
+</file>
+
+<file path=ppt/notesSlides/notesSlide14.xml><?xml version="1.0" encoding="utf-8"?>
+<p:notes xmlns:a="http://schemas.openxmlformats.org/drawingml/2006/main" xmlns:r="http://schemas.openxmlformats.org/officeDocument/2006/relationships" xmlns:p="http://schemas.openxmlformats.org/presentationml/2006/main">
+  <p:cSld>
+    <p:spTree>
+      <p:nvGrpSpPr>
+        <p:cNvPr id="1" name=""/>
+        <p:cNvGrpSpPr/>
+        <p:nvPr/>
+      </p:nvGrpSpPr>
+      <p:grpSpPr>
+        <a:xfrm>
+          <a:off x="0" y="0"/>
+          <a:ext cx="0" cy="0"/>
+          <a:chOff x="0" y="0"/>
+          <a:chExt cx="0" cy="0"/>
+        </a:xfrm>
+      </p:grpSpPr>
+      <p:sp>
+        <p:nvSpPr>
+          <p:cNvPr id="2" name="Slide Image Placeholder 1"/>
+          <p:cNvSpPr>
+            <a:spLocks noGrp="1" noRot="1" noChangeAspect="1"/>
+          </p:cNvSpPr>
+          <p:nvPr>
+            <p:ph type="sldImg"/>
+          </p:nvPr>
+        </p:nvSpPr>
+        <p:spPr/>
+      </p:sp>
+      <p:sp>
+        <p:nvSpPr>
+          <p:cNvPr id="3" name="Notes Placeholder 2"/>
+          <p:cNvSpPr>
+            <a:spLocks noGrp="1"/>
+          </p:cNvSpPr>
+          <p:nvPr>
+            <p:ph type="body" idx="1"/>
+          </p:nvPr>
+        </p:nvSpPr>
+        <p:spPr/>
+        <p:txBody>
+          <a:bodyPr/>
+          <a:lstStyle/>
+          <a:p>
+            <a:r>
+              <a:rPr lang="en-US" dirty="0"/>
+              <a:t/>
+            </a:r>
+            <a:endParaRPr lang="en-US" dirty="0"/>
+          </a:p>
+        </p:txBody>
+      </p:sp>
+      <p:sp>
+        <p:nvSpPr>
+          <p:cNvPr id="4" name="Slide Number Placeholder 3"/>
+          <p:cNvSpPr>
+            <a:spLocks noGrp="1"/>
+          </p:cNvSpPr>
+          <p:nvPr>
+            <p:ph type="sldNum" sz="quarter" idx="10"/>
+          </p:nvPr>
+        </p:nvSpPr>
+        <p:spPr/>
+        <p:txBody>
+          <a:bodyPr/>
+          <a:lstStyle/>
+          <a:p>
+            <a:fld id="{F7021451-1387-4CA6-816F-3879F97B5CBC}" type="slidenum">
+              <a:rPr lang="en-US"/>
+              <a:t>14</a:t>
+            </a:fld>
+            <a:endParaRPr lang="en-US"/>
+          </a:p>
+        </p:txBody>
+      </p:sp>
+    </p:spTree>
+    <p:extLst>
+      <p:ext uri="{BB962C8B-B14F-4D97-AF65-F5344CB8AC3E}">
+        <p14:creationId xmlns:p14="http://schemas.microsoft.com/office/powerpoint/2010/main" val="1024086991"/>
+      </p:ext>
+    </p:extLst>
+  </p:cSld>
+  <p:clrMapOvr>
+    <a:masterClrMapping/>
+  </p:clrMapOvr>
+</p:notes>
+</file>
+
+<file path=ppt/notesSlides/notesSlide15.xml><?xml version="1.0" encoding="utf-8"?>
+<p:notes xmlns:a="http://schemas.openxmlformats.org/drawingml/2006/main" xmlns:r="http://schemas.openxmlformats.org/officeDocument/2006/relationships" xmlns:p="http://schemas.openxmlformats.org/presentationml/2006/main">
+  <p:cSld>
+    <p:spTree>
+      <p:nvGrpSpPr>
+        <p:cNvPr id="1" name=""/>
+        <p:cNvGrpSpPr/>
+        <p:nvPr/>
+      </p:nvGrpSpPr>
+      <p:grpSpPr>
+        <a:xfrm>
+          <a:off x="0" y="0"/>
+          <a:ext cx="0" cy="0"/>
+          <a:chOff x="0" y="0"/>
+          <a:chExt cx="0" cy="0"/>
+        </a:xfrm>
+      </p:grpSpPr>
+      <p:sp>
+        <p:nvSpPr>
+          <p:cNvPr id="2" name="Slide Image Placeholder 1"/>
+          <p:cNvSpPr>
+            <a:spLocks noGrp="1" noRot="1" noChangeAspect="1"/>
+          </p:cNvSpPr>
+          <p:nvPr>
+            <p:ph type="sldImg"/>
+          </p:nvPr>
+        </p:nvSpPr>
+        <p:spPr/>
+      </p:sp>
+      <p:sp>
+        <p:nvSpPr>
+          <p:cNvPr id="3" name="Notes Placeholder 2"/>
+          <p:cNvSpPr>
+            <a:spLocks noGrp="1"/>
+          </p:cNvSpPr>
+          <p:nvPr>
+            <p:ph type="body" idx="1"/>
+          </p:nvPr>
+        </p:nvSpPr>
+        <p:spPr/>
+        <p:txBody>
+          <a:bodyPr/>
+          <a:lstStyle/>
+          <a:p>
+            <a:r>
+              <a:rPr lang="en-US" dirty="0"/>
+              <a:t/>
+            </a:r>
+            <a:endParaRPr lang="en-US" dirty="0"/>
+          </a:p>
+        </p:txBody>
+      </p:sp>
+      <p:sp>
+        <p:nvSpPr>
+          <p:cNvPr id="4" name="Slide Number Placeholder 3"/>
+          <p:cNvSpPr>
+            <a:spLocks noGrp="1"/>
+          </p:cNvSpPr>
+          <p:nvPr>
+            <p:ph type="sldNum" sz="quarter" idx="10"/>
+          </p:nvPr>
+        </p:nvSpPr>
+        <p:spPr/>
+        <p:txBody>
+          <a:bodyPr/>
+          <a:lstStyle/>
+          <a:p>
+            <a:fld id="{F7021451-1387-4CA6-816F-3879F97B5CBC}" type="slidenum">
+              <a:rPr lang="en-US"/>
+              <a:t>15</a:t>
+            </a:fld>
+            <a:endParaRPr lang="en-US"/>
+          </a:p>
+        </p:txBody>
+      </p:sp>
+    </p:spTree>
+    <p:extLst>
+      <p:ext uri="{BB962C8B-B14F-4D97-AF65-F5344CB8AC3E}">
+        <p14:creationId xmlns:p14="http://schemas.microsoft.com/office/powerpoint/2010/main" val="1024086991"/>
+      </p:ext>
+    </p:extLst>
+  </p:cSld>
+  <p:clrMapOvr>
+    <a:masterClrMapping/>
+  </p:clrMapOvr>
+</p:notes>
+</file>
+
+<file path=ppt/notesSlides/notesSlide16.xml><?xml version="1.0" encoding="utf-8"?>
+<p:notes xmlns:a="http://schemas.openxmlformats.org/drawingml/2006/main" xmlns:r="http://schemas.openxmlformats.org/officeDocument/2006/relationships" xmlns:p="http://schemas.openxmlformats.org/presentationml/2006/main">
+  <p:cSld>
+    <p:spTree>
+      <p:nvGrpSpPr>
+        <p:cNvPr id="1" name=""/>
+        <p:cNvGrpSpPr/>
+        <p:nvPr/>
+      </p:nvGrpSpPr>
+      <p:grpSpPr>
+        <a:xfrm>
+          <a:off x="0" y="0"/>
+          <a:ext cx="0" cy="0"/>
+          <a:chOff x="0" y="0"/>
+          <a:chExt cx="0" cy="0"/>
+        </a:xfrm>
+      </p:grpSpPr>
+      <p:sp>
+        <p:nvSpPr>
+          <p:cNvPr id="2" name="Slide Image Placeholder 1"/>
+          <p:cNvSpPr>
+            <a:spLocks noGrp="1" noRot="1" noChangeAspect="1"/>
+          </p:cNvSpPr>
+          <p:nvPr>
+            <p:ph type="sldImg"/>
+          </p:nvPr>
+        </p:nvSpPr>
+        <p:spPr/>
+      </p:sp>
+      <p:sp>
+        <p:nvSpPr>
+          <p:cNvPr id="3" name="Notes Placeholder 2"/>
+          <p:cNvSpPr>
+            <a:spLocks noGrp="1"/>
+          </p:cNvSpPr>
+          <p:nvPr>
+            <p:ph type="body" idx="1"/>
+          </p:nvPr>
+        </p:nvSpPr>
+        <p:spPr/>
+        <p:txBody>
+          <a:bodyPr/>
+          <a:lstStyle/>
+          <a:p>
+            <a:r>
+              <a:rPr lang="en-US" dirty="0"/>
+              <a:t/>
+            </a:r>
+            <a:endParaRPr lang="en-US" dirty="0"/>
+          </a:p>
+        </p:txBody>
+      </p:sp>
+      <p:sp>
+        <p:nvSpPr>
+          <p:cNvPr id="4" name="Slide Number Placeholder 3"/>
+          <p:cNvSpPr>
+            <a:spLocks noGrp="1"/>
+          </p:cNvSpPr>
+          <p:nvPr>
+            <p:ph type="sldNum" sz="quarter" idx="10"/>
+          </p:nvPr>
+        </p:nvSpPr>
+        <p:spPr/>
+        <p:txBody>
+          <a:bodyPr/>
+          <a:lstStyle/>
+          <a:p>
+            <a:fld id="{F7021451-1387-4CA6-816F-3879F97B5CBC}" type="slidenum">
+              <a:rPr lang="en-US"/>
+              <a:t>16</a:t>
+            </a:fld>
+            <a:endParaRPr lang="en-US"/>
+          </a:p>
+        </p:txBody>
+      </p:sp>
+    </p:spTree>
+    <p:extLst>
+      <p:ext uri="{BB962C8B-B14F-4D97-AF65-F5344CB8AC3E}">
+        <p14:creationId xmlns:p14="http://schemas.microsoft.com/office/powerpoint/2010/main" val="1024086991"/>
+      </p:ext>
+    </p:extLst>
+  </p:cSld>
+  <p:clrMapOvr>
+    <a:masterClrMapping/>
+  </p:clrMapOvr>
+</p:notes>
+</file>
+
+<file path=ppt/notesSlides/notesSlide17.xml><?xml version="1.0" encoding="utf-8"?>
+<p:notes xmlns:a="http://schemas.openxmlformats.org/drawingml/2006/main" xmlns:r="http://schemas.openxmlformats.org/officeDocument/2006/relationships" xmlns:p="http://schemas.openxmlformats.org/presentationml/2006/main">
+  <p:cSld>
+    <p:spTree>
+      <p:nvGrpSpPr>
+        <p:cNvPr id="1" name=""/>
+        <p:cNvGrpSpPr/>
+        <p:nvPr/>
+      </p:nvGrpSpPr>
+      <p:grpSpPr>
+        <a:xfrm>
+          <a:off x="0" y="0"/>
+          <a:ext cx="0" cy="0"/>
+          <a:chOff x="0" y="0"/>
+          <a:chExt cx="0" cy="0"/>
+        </a:xfrm>
+      </p:grpSpPr>
+      <p:sp>
+        <p:nvSpPr>
+          <p:cNvPr id="2" name="Slide Image Placeholder 1"/>
+          <p:cNvSpPr>
+            <a:spLocks noGrp="1" noRot="1" noChangeAspect="1"/>
+          </p:cNvSpPr>
+          <p:nvPr>
+            <p:ph type="sldImg"/>
+          </p:nvPr>
+        </p:nvSpPr>
+        <p:spPr/>
+      </p:sp>
+      <p:sp>
+        <p:nvSpPr>
+          <p:cNvPr id="3" name="Notes Placeholder 2"/>
+          <p:cNvSpPr>
+            <a:spLocks noGrp="1"/>
+          </p:cNvSpPr>
+          <p:nvPr>
+            <p:ph type="body" idx="1"/>
+          </p:nvPr>
+        </p:nvSpPr>
+        <p:spPr/>
+        <p:txBody>
+          <a:bodyPr/>
+          <a:lstStyle/>
+          <a:p>
+            <a:r>
+              <a:rPr lang="en-US" dirty="0"/>
+              <a:t/>
+            </a:r>
+            <a:endParaRPr lang="en-US" dirty="0"/>
+          </a:p>
+        </p:txBody>
+      </p:sp>
+      <p:sp>
+        <p:nvSpPr>
+          <p:cNvPr id="4" name="Slide Number Placeholder 3"/>
+          <p:cNvSpPr>
+            <a:spLocks noGrp="1"/>
+          </p:cNvSpPr>
+          <p:nvPr>
+            <p:ph type="sldNum" sz="quarter" idx="10"/>
+          </p:nvPr>
+        </p:nvSpPr>
+        <p:spPr/>
+        <p:txBody>
+          <a:bodyPr/>
+          <a:lstStyle/>
+          <a:p>
+            <a:fld id="{F7021451-1387-4CA6-816F-3879F97B5CBC}" type="slidenum">
+              <a:rPr lang="en-US"/>
+              <a:t>17</a:t>
+            </a:fld>
+            <a:endParaRPr lang="en-US"/>
+          </a:p>
+        </p:txBody>
+      </p:sp>
+    </p:spTree>
+    <p:extLst>
+      <p:ext uri="{BB962C8B-B14F-4D97-AF65-F5344CB8AC3E}">
+        <p14:creationId xmlns:p14="http://schemas.microsoft.com/office/powerpoint/2010/main" val="1024086991"/>
+      </p:ext>
+    </p:extLst>
+  </p:cSld>
+  <p:clrMapOvr>
+    <a:masterClrMapping/>
+  </p:clrMapOvr>
+</p:notes>
+</file>
+
+<file path=ppt/notesSlides/notesSlide18.xml><?xml version="1.0" encoding="utf-8"?>
+<p:notes xmlns:a="http://schemas.openxmlformats.org/drawingml/2006/main" xmlns:r="http://schemas.openxmlformats.org/officeDocument/2006/relationships" xmlns:p="http://schemas.openxmlformats.org/presentationml/2006/main">
+  <p:cSld>
+    <p:spTree>
+      <p:nvGrpSpPr>
+        <p:cNvPr id="1" name=""/>
+        <p:cNvGrpSpPr/>
+        <p:nvPr/>
+      </p:nvGrpSpPr>
+      <p:grpSpPr>
+        <a:xfrm>
+          <a:off x="0" y="0"/>
+          <a:ext cx="0" cy="0"/>
+          <a:chOff x="0" y="0"/>
+          <a:chExt cx="0" cy="0"/>
+        </a:xfrm>
+      </p:grpSpPr>
+      <p:sp>
+        <p:nvSpPr>
+          <p:cNvPr id="2" name="Slide Image Placeholder 1"/>
+          <p:cNvSpPr>
+            <a:spLocks noGrp="1" noRot="1" noChangeAspect="1"/>
+          </p:cNvSpPr>
+          <p:nvPr>
+            <p:ph type="sldImg"/>
+          </p:nvPr>
+        </p:nvSpPr>
+        <p:spPr/>
+      </p:sp>
+      <p:sp>
+        <p:nvSpPr>
+          <p:cNvPr id="3" name="Notes Placeholder 2"/>
+          <p:cNvSpPr>
+            <a:spLocks noGrp="1"/>
+          </p:cNvSpPr>
+          <p:nvPr>
+            <p:ph type="body" idx="1"/>
+          </p:nvPr>
+        </p:nvSpPr>
+        <p:spPr/>
+        <p:txBody>
+          <a:bodyPr/>
+          <a:lstStyle/>
+          <a:p>
+            <a:r>
+              <a:rPr lang="en-US" dirty="0"/>
+              <a:t/>
+            </a:r>
+            <a:endParaRPr lang="en-US" dirty="0"/>
+          </a:p>
+        </p:txBody>
+      </p:sp>
+      <p:sp>
+        <p:nvSpPr>
+          <p:cNvPr id="4" name="Slide Number Placeholder 3"/>
+          <p:cNvSpPr>
+            <a:spLocks noGrp="1"/>
+          </p:cNvSpPr>
+          <p:nvPr>
+            <p:ph type="sldNum" sz="quarter" idx="10"/>
+          </p:nvPr>
+        </p:nvSpPr>
+        <p:spPr/>
+        <p:txBody>
+          <a:bodyPr/>
+          <a:lstStyle/>
+          <a:p>
+            <a:fld id="{F7021451-1387-4CA6-816F-3879F97B5CBC}" type="slidenum">
+              <a:rPr lang="en-US"/>
+              <a:t>18</a:t>
             </a:fld>
             <a:endParaRPr lang="en-US"/>
           </a:p>
@@ -2054,148 +2588,6 @@
         </p:nvSpPr>
         <p:spPr>
           <a:xfrm>
-            <a:off x="406301" y="1223963"/>
-            <a:ext cx="8498026" cy="274290"/>
-          </a:xfrm>
-          <a:prstGeom prst="rect">
-            <a:avLst/>
-          </a:prstGeom>
-          <a:noFill/>
-          <a:ln/>
-        </p:spPr>
-        <p:txBody>
-          <a:bodyPr wrap="square" lIns="0" tIns="0" rIns="0" bIns="0" rtlCol="0" anchor="t"/>
-          <a:lstStyle/>
-          <a:p>
-            <a:pPr algn="l" indent="0" marL="0">
-              <a:lnSpc>
-                <a:spcPts val="2160"/>
-              </a:lnSpc>
-              <a:spcBef>
-                <a:spcPts val="600"/>
-              </a:spcBef>
-              <a:spcAft>
-                <a:spcPts val="800"/>
-              </a:spcAft>
-              <a:buNone/>
-            </a:pPr>
-            <a:r>
-              <a:rPr lang="en-US" sz="1800" b="1" dirty="0">
-                <a:solidFill>
-                  <a:srgbClr val="FE4447"/>
-                </a:solidFill>
-                <a:latin typeface="Georgia" pitchFamily="34" charset="0"/>
-                <a:ea typeface="Georgia" pitchFamily="34" charset="-122"/>
-                <a:cs typeface="Georgia" pitchFamily="34" charset="-120"/>
-              </a:rPr>
-              <a:t>Learning objective</a:t>
-            </a:r>
-            <a:endParaRPr lang="en-US" sz="1800" dirty="0"/>
-          </a:p>
-        </p:txBody>
-      </p:sp>
-      <p:sp>
-        <p:nvSpPr>
-          <p:cNvPr id="6" name="Text 4"/>
-          <p:cNvSpPr/>
-          <p:nvPr/>
-        </p:nvSpPr>
-        <p:spPr>
-          <a:xfrm>
-            <a:off x="406301" y="1637854"/>
-            <a:ext cx="8498026" cy="426541"/>
-          </a:xfrm>
-          <a:prstGeom prst="rect">
-            <a:avLst/>
-          </a:prstGeom>
-          <a:noFill/>
-          <a:ln/>
-        </p:spPr>
-        <p:txBody>
-          <a:bodyPr wrap="square" lIns="0" tIns="0" rIns="0" bIns="0" rtlCol="0" anchor="t"/>
-          <a:lstStyle/>
-          <a:p>
-            <a:pPr algn="l" indent="0" marL="0">
-              <a:lnSpc>
-                <a:spcPts val="1680"/>
-              </a:lnSpc>
-              <a:spcBef>
-                <a:spcPts val="300"/>
-              </a:spcBef>
-              <a:spcAft>
-                <a:spcPts val="300"/>
-              </a:spcAft>
-              <a:buNone/>
-            </a:pPr>
-            <a:r>
-              <a:rPr lang="en-US" sz="1200" dirty="0">
-                <a:solidFill>
-                  <a:srgbClr val="1C2833"/>
-                </a:solidFill>
-                <a:latin typeface="Arial" pitchFamily="34" charset="0"/>
-                <a:ea typeface="Arial" pitchFamily="34" charset="-122"/>
-                <a:cs typeface="Arial" pitchFamily="34" charset="-120"/>
-              </a:rPr>
-              <a:t>Students recall the components of </a:t>
-            </a:r>
-            <a:pPr algn="l" indent="0" marL="0">
-              <a:lnSpc>
-                <a:spcPts val="1680"/>
-              </a:lnSpc>
-              <a:spcBef>
-                <a:spcPts val="300"/>
-              </a:spcBef>
-              <a:spcAft>
-                <a:spcPts val="300"/>
-              </a:spcAft>
-              <a:buNone/>
-            </a:pPr>
-            <a:r>
-              <a:rPr lang="en-US" sz="1200" i="1" dirty="0">
-                <a:solidFill>
-                  <a:srgbClr val="1C2833"/>
-                </a:solidFill>
-                <a:latin typeface="Arial" pitchFamily="34" charset="0"/>
-                <a:ea typeface="Arial" pitchFamily="34" charset="-122"/>
-                <a:cs typeface="Arial" pitchFamily="34" charset="-120"/>
-              </a:rPr>
-              <a:t>dinacharya</a:t>
-            </a:r>
-            <a:pPr algn="l" indent="0" marL="0">
-              <a:lnSpc>
-                <a:spcPts val="1680"/>
-              </a:lnSpc>
-              <a:spcBef>
-                <a:spcPts val="300"/>
-              </a:spcBef>
-              <a:spcAft>
-                <a:spcPts val="300"/>
-              </a:spcAft>
-              <a:buNone/>
-            </a:pPr>
-            <a:r>
-              <a:rPr lang="en-US" sz="1200" dirty="0">
-                <a:solidFill>
-                  <a:srgbClr val="1C2833"/>
-                </a:solidFill>
-                <a:latin typeface="Arial" pitchFamily="34" charset="0"/>
-                <a:ea typeface="Arial" pitchFamily="34" charset="-122"/>
-                <a:cs typeface="Arial" pitchFamily="34" charset="-120"/>
-              </a:rPr>
-              <a:t> (waking, oral hygiene, oil massage, exercise, meals, sleep) and articulate the principle behind each.</a:t>
-            </a:r>
-            <a:endParaRPr lang="en-US" sz="1200" dirty="0"/>
-          </a:p>
-        </p:txBody>
-      </p:sp>
-      <p:sp>
-        <p:nvSpPr>
-          <p:cNvPr id="7" name="Text 5"/>
-          <p:cNvSpPr/>
-          <p:nvPr/>
-        </p:nvSpPr>
-        <p:spPr>
-          <a:xfrm>
             <a:off x="406301" y="4434929"/>
             <a:ext cx="8498026" cy="213271"/>
           </a:xfrm>
@@ -2340,7 +2732,7 @@
                 <a:ea typeface="Georgia" pitchFamily="34" charset="-122"/>
                 <a:cs typeface="Georgia" pitchFamily="34" charset="-120"/>
               </a:rPr>
-              <a:t>Differentiation</a:t>
+              <a:t>Core (25 min) (cont.)</a:t>
             </a:r>
             <a:endParaRPr lang="en-US" sz="1800" dirty="0"/>
           </a:p>
@@ -2355,7 +2747,7 @@
         <p:spPr>
           <a:xfrm>
             <a:off x="634901" y="883593"/>
-            <a:ext cx="8102798" cy="525661"/>
+            <a:ext cx="8102798" cy="281880"/>
           </a:xfrm>
           <a:prstGeom prst="rect">
             <a:avLst/>
@@ -2386,30 +2778,32 @@
                 <a:ea typeface="Arial" pitchFamily="34" charset="-122"/>
                 <a:cs typeface="Arial" pitchFamily="34" charset="-120"/>
               </a:rPr>
-              <a:t>Tier up:</a:t>
-            </a:r>
-            <a:pPr algn="l" indent="0" marL="0">
-              <a:lnSpc>
-                <a:spcPts val="1620"/>
-              </a:lnSpc>
-              <a:spcAft>
-                <a:spcPts val="300"/>
-              </a:spcAft>
-              <a:buNone/>
-            </a:pPr>
-            <a:r>
-              <a:rPr lang="en-US" sz="1200" dirty="0">
-                <a:solidFill>
-                  <a:srgbClr val="1C2833"/>
-                </a:solidFill>
-                <a:latin typeface="Arial" pitchFamily="34" charset="0"/>
-                <a:ea typeface="Arial" pitchFamily="34" charset="-122"/>
-                <a:cs typeface="Arial" pitchFamily="34" charset="-120"/>
-              </a:rPr>
-              <a:t> Read about Panda's time-restricted eating research. Note overlap with dinacharya meal timing.</a:t>
+              <a:t>Modern science overlap:</a:t>
             </a:r>
             <a:endParaRPr lang="en-US" sz="1200" dirty="0"/>
           </a:p>
+        </p:txBody>
+      </p:sp>
+      <p:sp>
+        <p:nvSpPr>
+          <p:cNvPr id="5" name="Text 3"/>
+          <p:cNvSpPr/>
+          <p:nvPr/>
+        </p:nvSpPr>
+        <p:spPr>
+          <a:xfrm>
+            <a:off x="634901" y="1266974"/>
+            <a:ext cx="8102798" cy="1218902"/>
+          </a:xfrm>
+          <a:prstGeom prst="rect">
+            <a:avLst/>
+          </a:prstGeom>
+          <a:noFill/>
+          <a:ln/>
+        </p:spPr>
+        <p:txBody>
+          <a:bodyPr wrap="square" lIns="0" tIns="0" rIns="0" bIns="0" rtlCol="0" anchor="t"/>
+          <a:lstStyle/>
           <a:p>
             <a:pPr algn="l" marL="342900" indent="-342900">
               <a:lnSpc>
@@ -2430,7 +2824,7 @@
                 <a:ea typeface="Arial" pitchFamily="34" charset="-122"/>
                 <a:cs typeface="Arial" pitchFamily="34" charset="-120"/>
               </a:rPr>
-              <a:t>Tier down:</a:t>
+              <a:t>Circadian biology</a:t>
             </a:r>
             <a:pPr algn="l" indent="0" marL="0">
               <a:lnSpc>
@@ -2450,15 +2844,147 @@
                 <a:ea typeface="Arial" pitchFamily="34" charset="-122"/>
                 <a:cs typeface="Arial" pitchFamily="34" charset="-120"/>
               </a:rPr>
-              <a:t> Focus on 3 practices: wake with sun, eat largest meal mid-morning, sleep by 10pm.</a:t>
+              <a:t> (Aschoff 1965, Nobel Prize 2017 to Hall, Rosbash, Young) — confirms ~24-hour rhythms in metabolism, hormones, sleep.</a:t>
             </a:r>
             <a:endParaRPr lang="en-US" sz="1200" dirty="0"/>
           </a:p>
-        </p:txBody>
-      </p:sp>
-      <p:sp>
-        <p:nvSpPr>
-          <p:cNvPr id="5" name="Text 3"/>
+          <a:p>
+            <a:pPr algn="l" marL="342900" indent="-342900">
+              <a:lnSpc>
+                <a:spcPts val="1620"/>
+              </a:lnSpc>
+              <a:spcAft>
+                <a:spcPts val="300"/>
+              </a:spcAft>
+              <a:buSzPct val="100000"/>
+              <a:buChar char="•"/>
+            </a:pPr>
+            <a:r>
+              <a:rPr lang="en-US" sz="1200" b="1" dirty="0">
+                <a:solidFill>
+                  <a:srgbClr val="1C2833"/>
+                </a:solidFill>
+                <a:latin typeface="Arial" pitchFamily="34" charset="0"/>
+                <a:ea typeface="Arial" pitchFamily="34" charset="-122"/>
+                <a:cs typeface="Arial" pitchFamily="34" charset="-120"/>
+              </a:rPr>
+              <a:t>Time-restricted eating</a:t>
+            </a:r>
+            <a:pPr algn="l" indent="0" marL="0">
+              <a:lnSpc>
+                <a:spcPts val="1620"/>
+              </a:lnSpc>
+              <a:spcAft>
+                <a:spcPts val="300"/>
+              </a:spcAft>
+              <a:buNone/>
+            </a:pPr>
+            <a:r>
+              <a:rPr lang="en-US" sz="1200" dirty="0">
+                <a:solidFill>
+                  <a:srgbClr val="1C2833"/>
+                </a:solidFill>
+                <a:latin typeface="Arial" pitchFamily="34" charset="0"/>
+                <a:ea typeface="Arial" pitchFamily="34" charset="-122"/>
+                <a:cs typeface="Arial" pitchFamily="34" charset="-120"/>
+              </a:rPr>
+              <a:t> (Satchidananda Panda's work) — confirms larger meal earlier is metabolically better.</a:t>
+            </a:r>
+            <a:endParaRPr lang="en-US" sz="1200" dirty="0"/>
+          </a:p>
+          <a:p>
+            <a:pPr algn="l" marL="342900" indent="-342900">
+              <a:lnSpc>
+                <a:spcPts val="1620"/>
+              </a:lnSpc>
+              <a:spcAft>
+                <a:spcPts val="300"/>
+              </a:spcAft>
+              <a:buSzPct val="100000"/>
+              <a:buChar char="•"/>
+            </a:pPr>
+            <a:r>
+              <a:rPr lang="en-US" sz="1200" b="1" dirty="0">
+                <a:solidFill>
+                  <a:srgbClr val="1C2833"/>
+                </a:solidFill>
+                <a:latin typeface="Arial" pitchFamily="34" charset="0"/>
+                <a:ea typeface="Arial" pitchFamily="34" charset="-122"/>
+                <a:cs typeface="Arial" pitchFamily="34" charset="-120"/>
+              </a:rPr>
+              <a:t>Sleep science</a:t>
+            </a:r>
+            <a:pPr algn="l" indent="0" marL="0">
+              <a:lnSpc>
+                <a:spcPts val="1620"/>
+              </a:lnSpc>
+              <a:spcAft>
+                <a:spcPts val="300"/>
+              </a:spcAft>
+              <a:buNone/>
+            </a:pPr>
+            <a:r>
+              <a:rPr lang="en-US" sz="1200" dirty="0">
+                <a:solidFill>
+                  <a:srgbClr val="1C2833"/>
+                </a:solidFill>
+                <a:latin typeface="Arial" pitchFamily="34" charset="0"/>
+                <a:ea typeface="Arial" pitchFamily="34" charset="-122"/>
+                <a:cs typeface="Arial" pitchFamily="34" charset="-120"/>
+              </a:rPr>
+              <a:t> — confirms sleeping by ~10pm aligns with melatonin curve.</a:t>
+            </a:r>
+            <a:endParaRPr lang="en-US" sz="1200" dirty="0"/>
+          </a:p>
+          <a:p>
+            <a:pPr algn="l" marL="342900" indent="-342900">
+              <a:lnSpc>
+                <a:spcPts val="1620"/>
+              </a:lnSpc>
+              <a:spcAft>
+                <a:spcPts val="300"/>
+              </a:spcAft>
+              <a:buSzPct val="100000"/>
+              <a:buChar char="•"/>
+            </a:pPr>
+            <a:r>
+              <a:rPr lang="en-US" sz="1200" b="1" dirty="0">
+                <a:solidFill>
+                  <a:srgbClr val="1C2833"/>
+                </a:solidFill>
+                <a:latin typeface="Arial" pitchFamily="34" charset="0"/>
+                <a:ea typeface="Arial" pitchFamily="34" charset="-122"/>
+                <a:cs typeface="Arial" pitchFamily="34" charset="-120"/>
+              </a:rPr>
+              <a:t>Oil massage</a:t>
+            </a:r>
+            <a:pPr algn="l" indent="0" marL="0">
+              <a:lnSpc>
+                <a:spcPts val="1620"/>
+              </a:lnSpc>
+              <a:spcAft>
+                <a:spcPts val="300"/>
+              </a:spcAft>
+              <a:buNone/>
+            </a:pPr>
+            <a:r>
+              <a:rPr lang="en-US" sz="1200" dirty="0">
+                <a:solidFill>
+                  <a:srgbClr val="1C2833"/>
+                </a:solidFill>
+                <a:latin typeface="Arial" pitchFamily="34" charset="0"/>
+                <a:ea typeface="Arial" pitchFamily="34" charset="-122"/>
+                <a:cs typeface="Arial" pitchFamily="34" charset="-120"/>
+              </a:rPr>
+              <a:t> — emerging evidence on skin barrier, lymphatic drainage.</a:t>
+            </a:r>
+            <a:endParaRPr lang="en-US" sz="1200" dirty="0"/>
+          </a:p>
+        </p:txBody>
+      </p:sp>
+      <p:sp>
+        <p:nvSpPr>
+          <p:cNvPr id="6" name="Text 4"/>
           <p:cNvSpPr/>
           <p:nvPr/>
         </p:nvSpPr>
@@ -2608,7 +3134,7 @@
                 <a:ea typeface="Georgia" pitchFamily="34" charset="-122"/>
                 <a:cs typeface="Georgia" pitchFamily="34" charset="-120"/>
               </a:rPr>
-              <a:t>Teacher notes</a:t>
+              <a:t>Core (25 min) (cont.)</a:t>
             </a:r>
             <a:endParaRPr lang="en-US" sz="1800" dirty="0"/>
           </a:p>
@@ -2622,8 +3148,8 @@
         </p:nvSpPr>
         <p:spPr>
           <a:xfrm>
-            <a:off x="406301" y="870942"/>
-            <a:ext cx="8498026" cy="639812"/>
+            <a:off x="634901" y="883593"/>
+            <a:ext cx="8102798" cy="487561"/>
           </a:xfrm>
           <a:prstGeom prst="rect">
             <a:avLst/>
@@ -2635,13 +3161,31 @@
           <a:bodyPr wrap="square" lIns="0" tIns="0" rIns="0" bIns="0" rtlCol="0" anchor="t"/>
           <a:lstStyle/>
           <a:p>
-            <a:pPr algn="l" indent="0" marL="0">
-              <a:lnSpc>
-                <a:spcPts val="1680"/>
-              </a:lnSpc>
-              <a:spcBef>
-                <a:spcPts val="300"/>
-              </a:spcBef>
+            <a:pPr algn="l" marL="342900" indent="-342900">
+              <a:lnSpc>
+                <a:spcPts val="1620"/>
+              </a:lnSpc>
+              <a:spcAft>
+                <a:spcPts val="300"/>
+              </a:spcAft>
+              <a:buSzPct val="100000"/>
+              <a:buChar char="•"/>
+            </a:pPr>
+            <a:r>
+              <a:rPr lang="en-US" sz="1200" b="1" dirty="0">
+                <a:solidFill>
+                  <a:srgbClr val="1C2833"/>
+                </a:solidFill>
+                <a:latin typeface="Arial" pitchFamily="34" charset="0"/>
+                <a:ea typeface="Arial" pitchFamily="34" charset="-122"/>
+                <a:cs typeface="Arial" pitchFamily="34" charset="-120"/>
+              </a:rPr>
+              <a:t>The honest framing:</a:t>
+            </a:r>
+            <a:pPr algn="l" indent="0" marL="0">
+              <a:lnSpc>
+                <a:spcPts val="1620"/>
+              </a:lnSpc>
               <a:spcAft>
                 <a:spcPts val="300"/>
               </a:spcAft>
@@ -2656,53 +3200,7 @@
                 <a:ea typeface="Arial" pitchFamily="34" charset="-122"/>
                 <a:cs typeface="Arial" pitchFamily="34" charset="-120"/>
               </a:rPr>
-              <a:t>– The "brāhma muhūrta wake time" is </a:t>
-            </a:r>
-            <a:pPr algn="l" indent="0" marL="0">
-              <a:lnSpc>
-                <a:spcPts val="1680"/>
-              </a:lnSpc>
-              <a:spcBef>
-                <a:spcPts val="300"/>
-              </a:spcBef>
-              <a:spcAft>
-                <a:spcPts val="300"/>
-              </a:spcAft>
-              <a:buNone/>
-            </a:pPr>
-            <a:r>
-              <a:rPr lang="en-US" sz="1200" i="1" dirty="0">
-                <a:solidFill>
-                  <a:srgbClr val="1C2833"/>
-                </a:solidFill>
-                <a:latin typeface="Arial" pitchFamily="34" charset="0"/>
-                <a:ea typeface="Arial" pitchFamily="34" charset="-122"/>
-                <a:cs typeface="Arial" pitchFamily="34" charset="-120"/>
-              </a:rPr>
-              <a:t>traditionally</a:t>
-            </a:r>
-            <a:pPr algn="l" indent="0" marL="0">
-              <a:lnSpc>
-                <a:spcPts val="1680"/>
-              </a:lnSpc>
-              <a:spcBef>
-                <a:spcPts val="300"/>
-              </a:spcBef>
-              <a:spcAft>
-                <a:spcPts val="300"/>
-              </a:spcAft>
-              <a:buNone/>
-            </a:pPr>
-            <a:r>
-              <a:rPr lang="en-US" sz="1200" dirty="0">
-                <a:solidFill>
-                  <a:srgbClr val="1C2833"/>
-                </a:solidFill>
-                <a:latin typeface="Arial" pitchFamily="34" charset="0"/>
-                <a:ea typeface="Arial" pitchFamily="34" charset="-122"/>
-                <a:cs typeface="Arial" pitchFamily="34" charset="-120"/>
-              </a:rPr>
-              <a:t> recommended but unrealistic for many students. Don't push. – The science overlap is real; don't oversell ("Ayurveda predicted everything"). The honest framing: "tradition observed; science measured; they agree on much."</a:t>
+              <a:t> Many dinacharya practices align with modern lifestyle medicine. The framework was figured out from observation centuries before modern measurement.</a:t>
             </a:r>
             <a:endParaRPr lang="en-US" sz="1200" dirty="0"/>
           </a:p>
@@ -2860,7 +3358,7 @@
                 <a:ea typeface="Georgia" pitchFamily="34" charset="-122"/>
                 <a:cs typeface="Georgia" pitchFamily="34" charset="-120"/>
               </a:rPr>
-              <a:t>Citation(s) used</a:t>
+              <a:t>Read primary source (5 min)</a:t>
             </a:r>
             <a:endParaRPr lang="en-US" sz="1800" dirty="0"/>
           </a:p>
@@ -2875,7 +3373,7 @@
         <p:spPr>
           <a:xfrm>
             <a:off x="406301" y="870942"/>
-            <a:ext cx="8498026" cy="436066"/>
+            <a:ext cx="8498026" cy="213271"/>
           </a:xfrm>
           <a:prstGeom prst="rect">
             <a:avLst/>
@@ -2900,6 +3398,201 @@
               <a:buNone/>
             </a:pPr>
             <a:r>
+              <a:rPr lang="en-US" sz="1200" b="1" dirty="0">
+                <a:solidFill>
+                  <a:srgbClr val="1C2833"/>
+                </a:solidFill>
+                <a:latin typeface="Arial" pitchFamily="34" charset="0"/>
+                <a:ea typeface="Arial" pitchFamily="34" charset="-122"/>
+                <a:cs typeface="Arial" pitchFamily="34" charset="-120"/>
+              </a:rPr>
+              <a:t>BG 6.17:</a:t>
+            </a:r>
+            <a:endParaRPr lang="en-US" sz="1200" dirty="0"/>
+          </a:p>
+        </p:txBody>
+      </p:sp>
+      <p:sp>
+        <p:nvSpPr>
+          <p:cNvPr id="5" name="Text 3"/>
+          <p:cNvSpPr/>
+          <p:nvPr/>
+        </p:nvSpPr>
+        <p:spPr>
+          <a:xfrm>
+            <a:off x="406301" y="1173063"/>
+            <a:ext cx="8331398" cy="611981"/>
+          </a:xfrm>
+          <a:prstGeom prst="rect">
+            <a:avLst/>
+          </a:prstGeom>
+          <a:solidFill>
+            <a:srgbClr val="F4F8F9"/>
+          </a:solidFill>
+          <a:ln/>
+        </p:spPr>
+        <p:txBody>
+          <a:bodyPr wrap="square" rtlCol="0" anchor="ctr"/>
+          <a:lstStyle/>
+          <a:p>
+            <a:pPr indent="0" marL="0">
+              <a:buNone/>
+            </a:pPr>
+            <a:endParaRPr lang="en-US" dirty="0"/>
+          </a:p>
+        </p:txBody>
+      </p:sp>
+      <p:sp>
+        <p:nvSpPr>
+          <p:cNvPr id="6" name="Shape 4"/>
+          <p:cNvSpPr/>
+          <p:nvPr/>
+        </p:nvSpPr>
+        <p:spPr>
+          <a:xfrm>
+            <a:off x="434876" y="1173063"/>
+            <a:ext cx="0" cy="611981"/>
+          </a:xfrm>
+          <a:prstGeom prst="line">
+            <a:avLst/>
+          </a:prstGeom>
+          <a:noFill/>
+          <a:ln w="57150">
+            <a:solidFill>
+              <a:srgbClr val="FE4447"/>
+            </a:solidFill>
+            <a:prstDash val="solid"/>
+          </a:ln>
+        </p:spPr>
+      </p:sp>
+      <p:sp>
+        <p:nvSpPr>
+          <p:cNvPr id="7" name="Text 5"/>
+          <p:cNvSpPr/>
+          <p:nvPr/>
+        </p:nvSpPr>
+        <p:spPr>
+          <a:xfrm>
+            <a:off x="692051" y="1363563"/>
+            <a:ext cx="7973389" cy="230981"/>
+          </a:xfrm>
+          <a:prstGeom prst="rect">
+            <a:avLst/>
+          </a:prstGeom>
+          <a:noFill/>
+          <a:ln/>
+        </p:spPr>
+        <p:txBody>
+          <a:bodyPr wrap="square" lIns="0" tIns="0" rIns="0" bIns="0" rtlCol="0" anchor="t"/>
+          <a:lstStyle/>
+          <a:p>
+            <a:pPr algn="l" indent="0" marL="0">
+              <a:lnSpc>
+                <a:spcPts val="1820"/>
+              </a:lnSpc>
+              <a:spcBef>
+                <a:spcPts val="300"/>
+              </a:spcBef>
+              <a:spcAft>
+                <a:spcPts val="300"/>
+              </a:spcAft>
+              <a:buNone/>
+            </a:pPr>
+            <a:r>
+              <a:rPr lang="en-US" sz="1300" i="1" dirty="0">
+                <a:solidFill>
+                  <a:srgbClr val="1C2833"/>
+                </a:solidFill>
+                <a:latin typeface="Georgia" pitchFamily="34" charset="0"/>
+                <a:ea typeface="Georgia" pitchFamily="34" charset="-122"/>
+                <a:cs typeface="Georgia" pitchFamily="34" charset="-120"/>
+              </a:rPr>
+              <a:t>yuktāhāra-vihārasya yukta-ceṣṭasya karmasu</a:t>
+            </a:r>
+            <a:pPr algn="l" indent="0" marL="0">
+              <a:lnSpc>
+                <a:spcPts val="1820"/>
+              </a:lnSpc>
+              <a:spcBef>
+                <a:spcPts val="300"/>
+              </a:spcBef>
+              <a:spcAft>
+                <a:spcPts val="300"/>
+              </a:spcAft>
+              <a:buNone/>
+            </a:pPr>
+            <a:r>
+              <a:rPr lang="en-US" sz="1300" dirty="0">
+                <a:solidFill>
+                  <a:srgbClr val="1C2833"/>
+                </a:solidFill>
+                <a:latin typeface="Georgia" pitchFamily="34" charset="0"/>
+                <a:ea typeface="Georgia" pitchFamily="34" charset="-122"/>
+                <a:cs typeface="Georgia" pitchFamily="34" charset="-120"/>
+              </a:rPr>
+              <a:t> </a:t>
+            </a:r>
+            <a:pPr algn="l" indent="0" marL="0">
+              <a:lnSpc>
+                <a:spcPts val="1820"/>
+              </a:lnSpc>
+              <a:spcBef>
+                <a:spcPts val="300"/>
+              </a:spcBef>
+              <a:spcAft>
+                <a:spcPts val="300"/>
+              </a:spcAft>
+              <a:buNone/>
+            </a:pPr>
+            <a:r>
+              <a:rPr lang="en-US" sz="1300" i="1" dirty="0">
+                <a:solidFill>
+                  <a:srgbClr val="1C2833"/>
+                </a:solidFill>
+                <a:latin typeface="Georgia" pitchFamily="34" charset="0"/>
+                <a:ea typeface="Georgia" pitchFamily="34" charset="-122"/>
+                <a:cs typeface="Georgia" pitchFamily="34" charset="-120"/>
+              </a:rPr>
+              <a:t>yukta-svapnāvabodhasya yogo bhavati duḥkha-hā</a:t>
+            </a:r>
+            <a:endParaRPr lang="en-US" sz="1300" dirty="0"/>
+          </a:p>
+        </p:txBody>
+      </p:sp>
+      <p:sp>
+        <p:nvSpPr>
+          <p:cNvPr id="8" name="Text 6"/>
+          <p:cNvSpPr/>
+          <p:nvPr/>
+        </p:nvSpPr>
+        <p:spPr>
+          <a:xfrm>
+            <a:off x="406301" y="1873895"/>
+            <a:ext cx="8498026" cy="213271"/>
+          </a:xfrm>
+          <a:prstGeom prst="rect">
+            <a:avLst/>
+          </a:prstGeom>
+          <a:noFill/>
+          <a:ln/>
+        </p:spPr>
+        <p:txBody>
+          <a:bodyPr wrap="square" lIns="0" tIns="0" rIns="0" bIns="0" rtlCol="0" anchor="t"/>
+          <a:lstStyle/>
+          <a:p>
+            <a:pPr algn="l" indent="0" marL="0">
+              <a:lnSpc>
+                <a:spcPts val="1680"/>
+              </a:lnSpc>
+              <a:spcBef>
+                <a:spcPts val="300"/>
+              </a:spcBef>
+              <a:spcAft>
+                <a:spcPts val="300"/>
+              </a:spcAft>
+              <a:buNone/>
+            </a:pPr>
+            <a:r>
               <a:rPr lang="en-US" sz="1200" dirty="0">
                 <a:solidFill>
                   <a:srgbClr val="1C2833"/>
@@ -2908,8 +3601,33 @@
                 <a:ea typeface="Arial" pitchFamily="34" charset="-122"/>
                 <a:cs typeface="Arial" pitchFamily="34" charset="-120"/>
               </a:rPr>
-              <a:t>– BG 6.17 — vidya-karana RAG cache </a:t>
-            </a:r>
+              <a:t>"He who is regulated in eating, recreation, work, sleep, and waking can mitigate sorrow."</a:t>
+            </a:r>
+            <a:endParaRPr lang="en-US" sz="1200" dirty="0"/>
+          </a:p>
+        </p:txBody>
+      </p:sp>
+      <p:sp>
+        <p:nvSpPr>
+          <p:cNvPr id="9" name="Text 7"/>
+          <p:cNvSpPr/>
+          <p:nvPr/>
+        </p:nvSpPr>
+        <p:spPr>
+          <a:xfrm>
+            <a:off x="406301" y="2163366"/>
+            <a:ext cx="8498026" cy="213271"/>
+          </a:xfrm>
+          <a:prstGeom prst="rect">
+            <a:avLst/>
+          </a:prstGeom>
+          <a:noFill/>
+          <a:ln/>
+        </p:spPr>
+        <p:txBody>
+          <a:bodyPr wrap="square" lIns="0" tIns="0" rIns="0" bIns="0" rtlCol="0" anchor="t"/>
+          <a:lstStyle/>
+          <a:p>
             <a:pPr algn="l" indent="0" marL="0">
               <a:lnSpc>
                 <a:spcPts val="1680"/>
@@ -2931,15 +3649,1406 @@
                 <a:ea typeface="Arial" pitchFamily="34" charset="-122"/>
                 <a:cs typeface="Arial" pitchFamily="34" charset="-120"/>
               </a:rPr>
+              <a:t>(Read aloud once. Won't fully analyse today — that's Day 7.)</a:t>
+            </a:r>
+            <a:endParaRPr lang="en-US" sz="1200" dirty="0"/>
+          </a:p>
+        </p:txBody>
+      </p:sp>
+      <p:sp>
+        <p:nvSpPr>
+          <p:cNvPr id="10" name="Text 8"/>
+          <p:cNvSpPr/>
+          <p:nvPr/>
+        </p:nvSpPr>
+        <p:spPr>
+          <a:xfrm>
+            <a:off x="406301" y="4434929"/>
+            <a:ext cx="8498026" cy="213271"/>
+          </a:xfrm>
+          <a:prstGeom prst="rect">
+            <a:avLst/>
+          </a:prstGeom>
+          <a:noFill/>
+          <a:ln/>
+        </p:spPr>
+        <p:txBody>
+          <a:bodyPr wrap="square" lIns="0" tIns="0" rIns="0" bIns="0" rtlCol="0" anchor="t"/>
+          <a:lstStyle/>
+          <a:p>
+            <a:pPr algn="l" indent="0" marL="0">
+              <a:lnSpc>
+                <a:spcPts val="1680"/>
+              </a:lnSpc>
+              <a:spcBef>
+                <a:spcPts val="300"/>
+              </a:spcBef>
+              <a:spcAft>
+                <a:spcPts val="300"/>
+              </a:spcAft>
+              <a:buNone/>
+            </a:pPr>
+            <a:r>
+              <a:rPr lang="en-US" sz="1200" dirty="0">
+                <a:solidFill>
+                  <a:srgbClr val="1C2833"/>
+                </a:solidFill>
+                <a:latin typeface="Arial" pitchFamily="34" charset="0"/>
+                <a:ea typeface="Arial" pitchFamily="34" charset="-122"/>
+                <a:cs typeface="Arial" pitchFamily="34" charset="-120"/>
+              </a:rPr>
+              <a:t>Middle ·  · IKS Curriculum</a:t>
+            </a:r>
+            <a:endParaRPr lang="en-US" sz="1200" dirty="0"/>
+          </a:p>
+        </p:txBody>
+      </p:sp>
+    </p:spTree>
+  </p:cSld>
+  <p:clrMapOvr>
+    <a:masterClrMapping/>
+  </p:clrMapOvr>
+</p:sld>
+</file>
+
+<file path=ppt/slides/slide13.xml><?xml version="1.0" encoding="utf-8"?>
+<p:sld xmlns:a="http://schemas.openxmlformats.org/drawingml/2006/main" xmlns:r="http://schemas.openxmlformats.org/officeDocument/2006/relationships" xmlns:p="http://schemas.openxmlformats.org/presentationml/2006/main">
+  <p:cSld name="Slide 13">
+    <p:bg>
+      <p:bgPr>
+        <a:solidFill>
+          <a:srgbClr val="FFFFFF"/>
+        </a:solidFill>
+      </p:bgPr>
+    </p:bg>
+    <p:spTree>
+      <p:nvGrpSpPr>
+        <p:cNvPr id="1" name=""/>
+        <p:cNvGrpSpPr/>
+        <p:nvPr/>
+      </p:nvGrpSpPr>
+      <p:grpSpPr>
+        <a:xfrm>
+          <a:off x="0" y="0"/>
+          <a:ext cx="0" cy="0"/>
+          <a:chOff x="0" y="0"/>
+          <a:chExt cx="0" cy="0"/>
+        </a:xfrm>
+      </p:grpSpPr>
+      <p:sp>
+        <p:nvSpPr>
+          <p:cNvPr id="2" name="Text 0"/>
+          <p:cNvSpPr/>
+          <p:nvPr/>
+        </p:nvSpPr>
+        <p:spPr>
+          <a:xfrm>
+            <a:off x="0" y="0"/>
+            <a:ext cx="9144000" cy="101501"/>
+          </a:xfrm>
+          <a:prstGeom prst="rect">
+            <a:avLst/>
+          </a:prstGeom>
+          <a:solidFill>
+            <a:srgbClr val="277884"/>
+          </a:solidFill>
+          <a:ln/>
+        </p:spPr>
+        <p:txBody>
+          <a:bodyPr wrap="square" rtlCol="0" anchor="ctr"/>
+          <a:lstStyle/>
+          <a:p>
+            <a:pPr indent="0" marL="0">
+              <a:buNone/>
+            </a:pPr>
+            <a:endParaRPr lang="en-US" dirty="0"/>
+          </a:p>
+        </p:txBody>
+      </p:sp>
+      <p:sp>
+        <p:nvSpPr>
+          <p:cNvPr id="3" name="Text 1"/>
+          <p:cNvSpPr/>
+          <p:nvPr/>
+        </p:nvSpPr>
+        <p:spPr>
+          <a:xfrm>
+            <a:off x="406301" y="457051"/>
+            <a:ext cx="8498026" cy="274290"/>
+          </a:xfrm>
+          <a:prstGeom prst="rect">
+            <a:avLst/>
+          </a:prstGeom>
+          <a:noFill/>
+          <a:ln/>
+        </p:spPr>
+        <p:txBody>
+          <a:bodyPr wrap="square" lIns="0" tIns="0" rIns="0" bIns="0" rtlCol="0" anchor="t"/>
+          <a:lstStyle/>
+          <a:p>
+            <a:pPr algn="l" indent="0" marL="0">
+              <a:lnSpc>
+                <a:spcPts val="2160"/>
+              </a:lnSpc>
+              <a:spcBef>
+                <a:spcPts val="600"/>
+              </a:spcBef>
+              <a:spcAft>
+                <a:spcPts val="800"/>
+              </a:spcAft>
+              <a:buNone/>
+            </a:pPr>
+            <a:r>
+              <a:rPr lang="en-US" sz="1800" b="1" dirty="0">
+                <a:solidFill>
+                  <a:srgbClr val="FE4447"/>
+                </a:solidFill>
+                <a:latin typeface="Georgia" pitchFamily="34" charset="0"/>
+                <a:ea typeface="Georgia" pitchFamily="34" charset="-122"/>
+                <a:cs typeface="Georgia" pitchFamily="34" charset="-120"/>
+              </a:rPr>
+              <a:t>Activity (8 min) — Map your dinacharya</a:t>
+            </a:r>
+            <a:endParaRPr lang="en-US" sz="1800" dirty="0"/>
+          </a:p>
+        </p:txBody>
+      </p:sp>
+      <p:sp>
+        <p:nvSpPr>
+          <p:cNvPr id="4" name="Text 2"/>
+          <p:cNvSpPr/>
+          <p:nvPr/>
+        </p:nvSpPr>
+        <p:spPr>
+          <a:xfrm>
+            <a:off x="406301" y="870942"/>
+            <a:ext cx="8498026" cy="426541"/>
+          </a:xfrm>
+          <a:prstGeom prst="rect">
+            <a:avLst/>
+          </a:prstGeom>
+          <a:noFill/>
+          <a:ln/>
+        </p:spPr>
+        <p:txBody>
+          <a:bodyPr wrap="square" lIns="0" tIns="0" rIns="0" bIns="0" rtlCol="0" anchor="t"/>
+          <a:lstStyle/>
+          <a:p>
+            <a:pPr algn="l" indent="0" marL="0">
+              <a:lnSpc>
+                <a:spcPts val="1680"/>
+              </a:lnSpc>
+              <a:spcBef>
+                <a:spcPts val="300"/>
+              </a:spcBef>
+              <a:spcAft>
+                <a:spcPts val="300"/>
+              </a:spcAft>
+              <a:buNone/>
+            </a:pPr>
+            <a:r>
+              <a:rPr lang="en-US" sz="1200" dirty="0">
+                <a:solidFill>
+                  <a:srgbClr val="1C2833"/>
+                </a:solidFill>
+                <a:latin typeface="Arial" pitchFamily="34" charset="0"/>
+                <a:ea typeface="Arial" pitchFamily="34" charset="-122"/>
+                <a:cs typeface="Arial" pitchFamily="34" charset="-120"/>
+              </a:rPr>
+              <a:t>Each student writes their CURRENT daily routine in the dinacharya timeline format. Notice where it aligns and where it doesn't.</a:t>
+            </a:r>
+            <a:endParaRPr lang="en-US" sz="1200" dirty="0"/>
+          </a:p>
+        </p:txBody>
+      </p:sp>
+      <p:sp>
+        <p:nvSpPr>
+          <p:cNvPr id="5" name="Text 3"/>
+          <p:cNvSpPr/>
+          <p:nvPr/>
+        </p:nvSpPr>
+        <p:spPr>
+          <a:xfrm>
+            <a:off x="406301" y="4434929"/>
+            <a:ext cx="8498026" cy="213271"/>
+          </a:xfrm>
+          <a:prstGeom prst="rect">
+            <a:avLst/>
+          </a:prstGeom>
+          <a:noFill/>
+          <a:ln/>
+        </p:spPr>
+        <p:txBody>
+          <a:bodyPr wrap="square" lIns="0" tIns="0" rIns="0" bIns="0" rtlCol="0" anchor="t"/>
+          <a:lstStyle/>
+          <a:p>
+            <a:pPr algn="l" indent="0" marL="0">
+              <a:lnSpc>
+                <a:spcPts val="1680"/>
+              </a:lnSpc>
+              <a:spcBef>
+                <a:spcPts val="300"/>
+              </a:spcBef>
+              <a:spcAft>
+                <a:spcPts val="300"/>
+              </a:spcAft>
+              <a:buNone/>
+            </a:pPr>
+            <a:r>
+              <a:rPr lang="en-US" sz="1200" dirty="0">
+                <a:solidFill>
+                  <a:srgbClr val="1C2833"/>
+                </a:solidFill>
+                <a:latin typeface="Arial" pitchFamily="34" charset="0"/>
+                <a:ea typeface="Arial" pitchFamily="34" charset="-122"/>
+                <a:cs typeface="Arial" pitchFamily="34" charset="-120"/>
+              </a:rPr>
+              <a:t>Middle ·  · IKS Curriculum</a:t>
+            </a:r>
+            <a:endParaRPr lang="en-US" sz="1200" dirty="0"/>
+          </a:p>
+        </p:txBody>
+      </p:sp>
+    </p:spTree>
+  </p:cSld>
+  <p:clrMapOvr>
+    <a:masterClrMapping/>
+  </p:clrMapOvr>
+</p:sld>
+</file>
+
+<file path=ppt/slides/slide14.xml><?xml version="1.0" encoding="utf-8"?>
+<p:sld xmlns:a="http://schemas.openxmlformats.org/drawingml/2006/main" xmlns:r="http://schemas.openxmlformats.org/officeDocument/2006/relationships" xmlns:p="http://schemas.openxmlformats.org/presentationml/2006/main">
+  <p:cSld name="Slide 14">
+    <p:bg>
+      <p:bgPr>
+        <a:solidFill>
+          <a:srgbClr val="FFFFFF"/>
+        </a:solidFill>
+      </p:bgPr>
+    </p:bg>
+    <p:spTree>
+      <p:nvGrpSpPr>
+        <p:cNvPr id="1" name=""/>
+        <p:cNvGrpSpPr/>
+        <p:nvPr/>
+      </p:nvGrpSpPr>
+      <p:grpSpPr>
+        <a:xfrm>
+          <a:off x="0" y="0"/>
+          <a:ext cx="0" cy="0"/>
+          <a:chOff x="0" y="0"/>
+          <a:chExt cx="0" cy="0"/>
+        </a:xfrm>
+      </p:grpSpPr>
+      <p:sp>
+        <p:nvSpPr>
+          <p:cNvPr id="2" name="Text 0"/>
+          <p:cNvSpPr/>
+          <p:nvPr/>
+        </p:nvSpPr>
+        <p:spPr>
+          <a:xfrm>
+            <a:off x="0" y="0"/>
+            <a:ext cx="9144000" cy="101501"/>
+          </a:xfrm>
+          <a:prstGeom prst="rect">
+            <a:avLst/>
+          </a:prstGeom>
+          <a:solidFill>
+            <a:srgbClr val="277884"/>
+          </a:solidFill>
+          <a:ln/>
+        </p:spPr>
+        <p:txBody>
+          <a:bodyPr wrap="square" rtlCol="0" anchor="ctr"/>
+          <a:lstStyle/>
+          <a:p>
+            <a:pPr indent="0" marL="0">
+              <a:buNone/>
+            </a:pPr>
+            <a:endParaRPr lang="en-US" dirty="0"/>
+          </a:p>
+        </p:txBody>
+      </p:sp>
+      <p:sp>
+        <p:nvSpPr>
+          <p:cNvPr id="3" name="Text 1"/>
+          <p:cNvSpPr/>
+          <p:nvPr/>
+        </p:nvSpPr>
+        <p:spPr>
+          <a:xfrm>
+            <a:off x="406301" y="457051"/>
+            <a:ext cx="8498026" cy="274290"/>
+          </a:xfrm>
+          <a:prstGeom prst="rect">
+            <a:avLst/>
+          </a:prstGeom>
+          <a:noFill/>
+          <a:ln/>
+        </p:spPr>
+        <p:txBody>
+          <a:bodyPr wrap="square" lIns="0" tIns="0" rIns="0" bIns="0" rtlCol="0" anchor="t"/>
+          <a:lstStyle/>
+          <a:p>
+            <a:pPr algn="l" indent="0" marL="0">
+              <a:lnSpc>
+                <a:spcPts val="2160"/>
+              </a:lnSpc>
+              <a:spcBef>
+                <a:spcPts val="600"/>
+              </a:spcBef>
+              <a:spcAft>
+                <a:spcPts val="800"/>
+              </a:spcAft>
+              <a:buNone/>
+            </a:pPr>
+            <a:r>
+              <a:rPr lang="en-US" sz="1800" b="1" dirty="0">
+                <a:solidFill>
+                  <a:srgbClr val="FE4447"/>
+                </a:solidFill>
+                <a:latin typeface="Georgia" pitchFamily="34" charset="0"/>
+                <a:ea typeface="Georgia" pitchFamily="34" charset="-122"/>
+                <a:cs typeface="Georgia" pitchFamily="34" charset="-120"/>
+              </a:rPr>
+              <a:t>Wrap-up (2 min)</a:t>
+            </a:r>
+            <a:endParaRPr lang="en-US" sz="1800" dirty="0"/>
+          </a:p>
+        </p:txBody>
+      </p:sp>
+      <p:sp>
+        <p:nvSpPr>
+          <p:cNvPr id="4" name="Text 2"/>
+          <p:cNvSpPr/>
+          <p:nvPr/>
+        </p:nvSpPr>
+        <p:spPr>
+          <a:xfrm>
+            <a:off x="634901" y="883593"/>
+            <a:ext cx="8102798" cy="281880"/>
+          </a:xfrm>
+          <a:prstGeom prst="rect">
+            <a:avLst/>
+          </a:prstGeom>
+          <a:noFill/>
+          <a:ln/>
+        </p:spPr>
+        <p:txBody>
+          <a:bodyPr wrap="square" lIns="0" tIns="0" rIns="0" bIns="0" rtlCol="0" anchor="t"/>
+          <a:lstStyle/>
+          <a:p>
+            <a:pPr algn="l" marL="342900" indent="-342900">
+              <a:lnSpc>
+                <a:spcPts val="1620"/>
+              </a:lnSpc>
+              <a:spcAft>
+                <a:spcPts val="300"/>
+              </a:spcAft>
+              <a:buSzPct val="100000"/>
+              <a:buChar char="•"/>
+            </a:pPr>
+            <a:r>
+              <a:rPr lang="en-US" sz="1200" dirty="0">
+                <a:solidFill>
+                  <a:srgbClr val="1C2833"/>
+                </a:solidFill>
+                <a:latin typeface="Arial" pitchFamily="34" charset="0"/>
+                <a:ea typeface="Arial" pitchFamily="34" charset="-122"/>
+                <a:cs typeface="Arial" pitchFamily="34" charset="-120"/>
+              </a:rPr>
+              <a:t>Preview Day 5: </a:t>
+            </a:r>
+            <a:pPr algn="l" indent="0" marL="0">
+              <a:lnSpc>
+                <a:spcPts val="1620"/>
+              </a:lnSpc>
+              <a:spcAft>
+                <a:spcPts val="300"/>
+              </a:spcAft>
+              <a:buNone/>
+            </a:pPr>
+            <a:r>
+              <a:rPr lang="en-US" sz="1200" i="1" dirty="0">
+                <a:solidFill>
+                  <a:srgbClr val="1C2833"/>
+                </a:solidFill>
+                <a:latin typeface="Arial" pitchFamily="34" charset="0"/>
+                <a:ea typeface="Arial" pitchFamily="34" charset="-122"/>
+                <a:cs typeface="Arial" pitchFamily="34" charset="-120"/>
+              </a:rPr>
+              <a:t>"Tomorrow — mid-module check + project topic."</a:t>
+            </a:r>
+            <a:endParaRPr lang="en-US" sz="1200" dirty="0"/>
+          </a:p>
+        </p:txBody>
+      </p:sp>
+      <p:sp>
+        <p:nvSpPr>
+          <p:cNvPr id="5" name="Text 3"/>
+          <p:cNvSpPr/>
+          <p:nvPr/>
+        </p:nvSpPr>
+        <p:spPr>
+          <a:xfrm>
+            <a:off x="406301" y="4434929"/>
+            <a:ext cx="8498026" cy="213271"/>
+          </a:xfrm>
+          <a:prstGeom prst="rect">
+            <a:avLst/>
+          </a:prstGeom>
+          <a:noFill/>
+          <a:ln/>
+        </p:spPr>
+        <p:txBody>
+          <a:bodyPr wrap="square" lIns="0" tIns="0" rIns="0" bIns="0" rtlCol="0" anchor="t"/>
+          <a:lstStyle/>
+          <a:p>
+            <a:pPr algn="l" indent="0" marL="0">
+              <a:lnSpc>
+                <a:spcPts val="1680"/>
+              </a:lnSpc>
+              <a:spcBef>
+                <a:spcPts val="300"/>
+              </a:spcBef>
+              <a:spcAft>
+                <a:spcPts val="300"/>
+              </a:spcAft>
+              <a:buNone/>
+            </a:pPr>
+            <a:r>
+              <a:rPr lang="en-US" sz="1200" dirty="0">
+                <a:solidFill>
+                  <a:srgbClr val="1C2833"/>
+                </a:solidFill>
+                <a:latin typeface="Arial" pitchFamily="34" charset="0"/>
+                <a:ea typeface="Arial" pitchFamily="34" charset="-122"/>
+                <a:cs typeface="Arial" pitchFamily="34" charset="-120"/>
+              </a:rPr>
+              <a:t>Middle ·  · IKS Curriculum</a:t>
+            </a:r>
+            <a:endParaRPr lang="en-US" sz="1200" dirty="0"/>
+          </a:p>
+        </p:txBody>
+      </p:sp>
+    </p:spTree>
+  </p:cSld>
+  <p:clrMapOvr>
+    <a:masterClrMapping/>
+  </p:clrMapOvr>
+</p:sld>
+</file>
+
+<file path=ppt/slides/slide15.xml><?xml version="1.0" encoding="utf-8"?>
+<p:sld xmlns:a="http://schemas.openxmlformats.org/drawingml/2006/main" xmlns:r="http://schemas.openxmlformats.org/officeDocument/2006/relationships" xmlns:p="http://schemas.openxmlformats.org/presentationml/2006/main">
+  <p:cSld name="Slide 15">
+    <p:bg>
+      <p:bgPr>
+        <a:solidFill>
+          <a:srgbClr val="FFFFFF"/>
+        </a:solidFill>
+      </p:bgPr>
+    </p:bg>
+    <p:spTree>
+      <p:nvGrpSpPr>
+        <p:cNvPr id="1" name=""/>
+        <p:cNvGrpSpPr/>
+        <p:nvPr/>
+      </p:nvGrpSpPr>
+      <p:grpSpPr>
+        <a:xfrm>
+          <a:off x="0" y="0"/>
+          <a:ext cx="0" cy="0"/>
+          <a:chOff x="0" y="0"/>
+          <a:chExt cx="0" cy="0"/>
+        </a:xfrm>
+      </p:grpSpPr>
+      <p:sp>
+        <p:nvSpPr>
+          <p:cNvPr id="2" name="Text 0"/>
+          <p:cNvSpPr/>
+          <p:nvPr/>
+        </p:nvSpPr>
+        <p:spPr>
+          <a:xfrm>
+            <a:off x="0" y="0"/>
+            <a:ext cx="9144000" cy="101501"/>
+          </a:xfrm>
+          <a:prstGeom prst="rect">
+            <a:avLst/>
+          </a:prstGeom>
+          <a:solidFill>
+            <a:srgbClr val="277884"/>
+          </a:solidFill>
+          <a:ln/>
+        </p:spPr>
+        <p:txBody>
+          <a:bodyPr wrap="square" rtlCol="0" anchor="ctr"/>
+          <a:lstStyle/>
+          <a:p>
+            <a:pPr indent="0" marL="0">
+              <a:buNone/>
+            </a:pPr>
+            <a:endParaRPr lang="en-US" dirty="0"/>
+          </a:p>
+        </p:txBody>
+      </p:sp>
+      <p:sp>
+        <p:nvSpPr>
+          <p:cNvPr id="3" name="Text 1"/>
+          <p:cNvSpPr/>
+          <p:nvPr/>
+        </p:nvSpPr>
+        <p:spPr>
+          <a:xfrm>
+            <a:off x="406301" y="457051"/>
+            <a:ext cx="8498026" cy="274290"/>
+          </a:xfrm>
+          <a:prstGeom prst="rect">
+            <a:avLst/>
+          </a:prstGeom>
+          <a:noFill/>
+          <a:ln/>
+        </p:spPr>
+        <p:txBody>
+          <a:bodyPr wrap="square" lIns="0" tIns="0" rIns="0" bIns="0" rtlCol="0" anchor="t"/>
+          <a:lstStyle/>
+          <a:p>
+            <a:pPr algn="l" indent="0" marL="0">
+              <a:lnSpc>
+                <a:spcPts val="2160"/>
+              </a:lnSpc>
+              <a:spcBef>
+                <a:spcPts val="600"/>
+              </a:spcBef>
+              <a:spcAft>
+                <a:spcPts val="800"/>
+              </a:spcAft>
+              <a:buNone/>
+            </a:pPr>
+            <a:r>
+              <a:rPr lang="en-US" sz="1800" b="1" dirty="0">
+                <a:solidFill>
+                  <a:srgbClr val="FE4447"/>
+                </a:solidFill>
+                <a:latin typeface="Georgia" pitchFamily="34" charset="0"/>
+                <a:ea typeface="Georgia" pitchFamily="34" charset="-122"/>
+                <a:cs typeface="Georgia" pitchFamily="34" charset="-120"/>
+              </a:rPr>
+              <a:t>Homework</a:t>
+            </a:r>
+            <a:endParaRPr lang="en-US" sz="1800" dirty="0"/>
+          </a:p>
+        </p:txBody>
+      </p:sp>
+      <p:sp>
+        <p:nvSpPr>
+          <p:cNvPr id="4" name="Text 2"/>
+          <p:cNvSpPr/>
+          <p:nvPr/>
+        </p:nvSpPr>
+        <p:spPr>
+          <a:xfrm>
+            <a:off x="634901" y="883593"/>
+            <a:ext cx="8102798" cy="281880"/>
+          </a:xfrm>
+          <a:prstGeom prst="rect">
+            <a:avLst/>
+          </a:prstGeom>
+          <a:noFill/>
+          <a:ln/>
+        </p:spPr>
+        <p:txBody>
+          <a:bodyPr wrap="square" lIns="0" tIns="0" rIns="0" bIns="0" rtlCol="0" anchor="t"/>
+          <a:lstStyle/>
+          <a:p>
+            <a:pPr algn="l" marL="342900" indent="-342900">
+              <a:lnSpc>
+                <a:spcPts val="1620"/>
+              </a:lnSpc>
+              <a:spcAft>
+                <a:spcPts val="300"/>
+              </a:spcAft>
+              <a:buSzPct val="100000"/>
+              <a:buChar char="•"/>
+            </a:pPr>
+            <a:r>
+              <a:rPr lang="en-US" sz="1200" dirty="0">
+                <a:solidFill>
+                  <a:srgbClr val="1C2833"/>
+                </a:solidFill>
+                <a:latin typeface="Arial" pitchFamily="34" charset="0"/>
+                <a:ea typeface="Arial" pitchFamily="34" charset="-122"/>
+                <a:cs typeface="Arial" pitchFamily="34" charset="-120"/>
+              </a:rPr>
+              <a:t>Pick ONE dinacharya practice you don't currently do. Try it tomorrow. Note how it felt.</a:t>
+            </a:r>
+            <a:endParaRPr lang="en-US" sz="1200" dirty="0"/>
+          </a:p>
+        </p:txBody>
+      </p:sp>
+      <p:sp>
+        <p:nvSpPr>
+          <p:cNvPr id="5" name="Text 3"/>
+          <p:cNvSpPr/>
+          <p:nvPr/>
+        </p:nvSpPr>
+        <p:spPr>
+          <a:xfrm>
+            <a:off x="406301" y="4434929"/>
+            <a:ext cx="8498026" cy="213271"/>
+          </a:xfrm>
+          <a:prstGeom prst="rect">
+            <a:avLst/>
+          </a:prstGeom>
+          <a:noFill/>
+          <a:ln/>
+        </p:spPr>
+        <p:txBody>
+          <a:bodyPr wrap="square" lIns="0" tIns="0" rIns="0" bIns="0" rtlCol="0" anchor="t"/>
+          <a:lstStyle/>
+          <a:p>
+            <a:pPr algn="l" indent="0" marL="0">
+              <a:lnSpc>
+                <a:spcPts val="1680"/>
+              </a:lnSpc>
+              <a:spcBef>
+                <a:spcPts val="300"/>
+              </a:spcBef>
+              <a:spcAft>
+                <a:spcPts val="300"/>
+              </a:spcAft>
+              <a:buNone/>
+            </a:pPr>
+            <a:r>
+              <a:rPr lang="en-US" sz="1200" dirty="0">
+                <a:solidFill>
+                  <a:srgbClr val="1C2833"/>
+                </a:solidFill>
+                <a:latin typeface="Arial" pitchFamily="34" charset="0"/>
+                <a:ea typeface="Arial" pitchFamily="34" charset="-122"/>
+                <a:cs typeface="Arial" pitchFamily="34" charset="-120"/>
+              </a:rPr>
+              <a:t>Middle ·  · IKS Curriculum</a:t>
+            </a:r>
+            <a:endParaRPr lang="en-US" sz="1200" dirty="0"/>
+          </a:p>
+        </p:txBody>
+      </p:sp>
+    </p:spTree>
+  </p:cSld>
+  <p:clrMapOvr>
+    <a:masterClrMapping/>
+  </p:clrMapOvr>
+</p:sld>
+</file>
+
+<file path=ppt/slides/slide16.xml><?xml version="1.0" encoding="utf-8"?>
+<p:sld xmlns:a="http://schemas.openxmlformats.org/drawingml/2006/main" xmlns:r="http://schemas.openxmlformats.org/officeDocument/2006/relationships" xmlns:p="http://schemas.openxmlformats.org/presentationml/2006/main">
+  <p:cSld name="Slide 16">
+    <p:bg>
+      <p:bgPr>
+        <a:solidFill>
+          <a:srgbClr val="FFFFFF"/>
+        </a:solidFill>
+      </p:bgPr>
+    </p:bg>
+    <p:spTree>
+      <p:nvGrpSpPr>
+        <p:cNvPr id="1" name=""/>
+        <p:cNvGrpSpPr/>
+        <p:nvPr/>
+      </p:nvGrpSpPr>
+      <p:grpSpPr>
+        <a:xfrm>
+          <a:off x="0" y="0"/>
+          <a:ext cx="0" cy="0"/>
+          <a:chOff x="0" y="0"/>
+          <a:chExt cx="0" cy="0"/>
+        </a:xfrm>
+      </p:grpSpPr>
+      <p:sp>
+        <p:nvSpPr>
+          <p:cNvPr id="2" name="Text 0"/>
+          <p:cNvSpPr/>
+          <p:nvPr/>
+        </p:nvSpPr>
+        <p:spPr>
+          <a:xfrm>
+            <a:off x="0" y="0"/>
+            <a:ext cx="9144000" cy="101501"/>
+          </a:xfrm>
+          <a:prstGeom prst="rect">
+            <a:avLst/>
+          </a:prstGeom>
+          <a:solidFill>
+            <a:srgbClr val="277884"/>
+          </a:solidFill>
+          <a:ln/>
+        </p:spPr>
+        <p:txBody>
+          <a:bodyPr wrap="square" rtlCol="0" anchor="ctr"/>
+          <a:lstStyle/>
+          <a:p>
+            <a:pPr indent="0" marL="0">
+              <a:buNone/>
+            </a:pPr>
+            <a:endParaRPr lang="en-US" dirty="0"/>
+          </a:p>
+        </p:txBody>
+      </p:sp>
+      <p:sp>
+        <p:nvSpPr>
+          <p:cNvPr id="3" name="Text 1"/>
+          <p:cNvSpPr/>
+          <p:nvPr/>
+        </p:nvSpPr>
+        <p:spPr>
+          <a:xfrm>
+            <a:off x="406301" y="457051"/>
+            <a:ext cx="8498026" cy="274290"/>
+          </a:xfrm>
+          <a:prstGeom prst="rect">
+            <a:avLst/>
+          </a:prstGeom>
+          <a:noFill/>
+          <a:ln/>
+        </p:spPr>
+        <p:txBody>
+          <a:bodyPr wrap="square" lIns="0" tIns="0" rIns="0" bIns="0" rtlCol="0" anchor="t"/>
+          <a:lstStyle/>
+          <a:p>
+            <a:pPr algn="l" indent="0" marL="0">
+              <a:lnSpc>
+                <a:spcPts val="2160"/>
+              </a:lnSpc>
+              <a:spcBef>
+                <a:spcPts val="600"/>
+              </a:spcBef>
+              <a:spcAft>
+                <a:spcPts val="800"/>
+              </a:spcAft>
+              <a:buNone/>
+            </a:pPr>
+            <a:r>
+              <a:rPr lang="en-US" sz="1800" b="1" dirty="0">
+                <a:solidFill>
+                  <a:srgbClr val="FE4447"/>
+                </a:solidFill>
+                <a:latin typeface="Georgia" pitchFamily="34" charset="0"/>
+                <a:ea typeface="Georgia" pitchFamily="34" charset="-122"/>
+                <a:cs typeface="Georgia" pitchFamily="34" charset="-120"/>
+              </a:rPr>
+              <a:t>Differentiation</a:t>
+            </a:r>
+            <a:endParaRPr lang="en-US" sz="1800" dirty="0"/>
+          </a:p>
+        </p:txBody>
+      </p:sp>
+      <p:sp>
+        <p:nvSpPr>
+          <p:cNvPr id="4" name="Text 2"/>
+          <p:cNvSpPr/>
+          <p:nvPr/>
+        </p:nvSpPr>
+        <p:spPr>
+          <a:xfrm>
+            <a:off x="634901" y="883593"/>
+            <a:ext cx="8102798" cy="525661"/>
+          </a:xfrm>
+          <a:prstGeom prst="rect">
+            <a:avLst/>
+          </a:prstGeom>
+          <a:noFill/>
+          <a:ln/>
+        </p:spPr>
+        <p:txBody>
+          <a:bodyPr wrap="square" lIns="0" tIns="0" rIns="0" bIns="0" rtlCol="0" anchor="t"/>
+          <a:lstStyle/>
+          <a:p>
+            <a:pPr algn="l" marL="342900" indent="-342900">
+              <a:lnSpc>
+                <a:spcPts val="1620"/>
+              </a:lnSpc>
+              <a:spcAft>
+                <a:spcPts val="300"/>
+              </a:spcAft>
+              <a:buSzPct val="100000"/>
+              <a:buChar char="•"/>
+            </a:pPr>
+            <a:r>
+              <a:rPr lang="en-US" sz="1200" b="1" dirty="0">
+                <a:solidFill>
+                  <a:srgbClr val="1C2833"/>
+                </a:solidFill>
+                <a:latin typeface="Arial" pitchFamily="34" charset="0"/>
+                <a:ea typeface="Arial" pitchFamily="34" charset="-122"/>
+                <a:cs typeface="Arial" pitchFamily="34" charset="-120"/>
+              </a:rPr>
+              <a:t>Tier up:</a:t>
+            </a:r>
+            <a:pPr algn="l" indent="0" marL="0">
+              <a:lnSpc>
+                <a:spcPts val="1620"/>
+              </a:lnSpc>
+              <a:spcAft>
+                <a:spcPts val="300"/>
+              </a:spcAft>
+              <a:buNone/>
+            </a:pPr>
+            <a:r>
+              <a:rPr lang="en-US" sz="1200" dirty="0">
+                <a:solidFill>
+                  <a:srgbClr val="1C2833"/>
+                </a:solidFill>
+                <a:latin typeface="Arial" pitchFamily="34" charset="0"/>
+                <a:ea typeface="Arial" pitchFamily="34" charset="-122"/>
+                <a:cs typeface="Arial" pitchFamily="34" charset="-120"/>
+              </a:rPr>
+              <a:t> Read about Panda's time-restricted eating research. Note overlap with dinacharya meal timing.</a:t>
+            </a:r>
+            <a:endParaRPr lang="en-US" sz="1200" dirty="0"/>
+          </a:p>
+          <a:p>
+            <a:pPr algn="l" marL="342900" indent="-342900">
+              <a:lnSpc>
+                <a:spcPts val="1620"/>
+              </a:lnSpc>
+              <a:spcAft>
+                <a:spcPts val="300"/>
+              </a:spcAft>
+              <a:buSzPct val="100000"/>
+              <a:buChar char="•"/>
+            </a:pPr>
+            <a:r>
+              <a:rPr lang="en-US" sz="1200" b="1" dirty="0">
+                <a:solidFill>
+                  <a:srgbClr val="1C2833"/>
+                </a:solidFill>
+                <a:latin typeface="Arial" pitchFamily="34" charset="0"/>
+                <a:ea typeface="Arial" pitchFamily="34" charset="-122"/>
+                <a:cs typeface="Arial" pitchFamily="34" charset="-120"/>
+              </a:rPr>
+              <a:t>Tier down:</a:t>
+            </a:r>
+            <a:pPr algn="l" indent="0" marL="0">
+              <a:lnSpc>
+                <a:spcPts val="1620"/>
+              </a:lnSpc>
+              <a:spcAft>
+                <a:spcPts val="300"/>
+              </a:spcAft>
+              <a:buNone/>
+            </a:pPr>
+            <a:r>
+              <a:rPr lang="en-US" sz="1200" dirty="0">
+                <a:solidFill>
+                  <a:srgbClr val="1C2833"/>
+                </a:solidFill>
+                <a:latin typeface="Arial" pitchFamily="34" charset="0"/>
+                <a:ea typeface="Arial" pitchFamily="34" charset="-122"/>
+                <a:cs typeface="Arial" pitchFamily="34" charset="-120"/>
+              </a:rPr>
+              <a:t> Focus on 3 practices: wake with sun, eat largest meal mid-morning, sleep by 10pm.</a:t>
+            </a:r>
+            <a:endParaRPr lang="en-US" sz="1200" dirty="0"/>
+          </a:p>
+        </p:txBody>
+      </p:sp>
+      <p:sp>
+        <p:nvSpPr>
+          <p:cNvPr id="5" name="Text 3"/>
+          <p:cNvSpPr/>
+          <p:nvPr/>
+        </p:nvSpPr>
+        <p:spPr>
+          <a:xfrm>
+            <a:off x="406301" y="4434929"/>
+            <a:ext cx="8498026" cy="213271"/>
+          </a:xfrm>
+          <a:prstGeom prst="rect">
+            <a:avLst/>
+          </a:prstGeom>
+          <a:noFill/>
+          <a:ln/>
+        </p:spPr>
+        <p:txBody>
+          <a:bodyPr wrap="square" lIns="0" tIns="0" rIns="0" bIns="0" rtlCol="0" anchor="t"/>
+          <a:lstStyle/>
+          <a:p>
+            <a:pPr algn="l" indent="0" marL="0">
+              <a:lnSpc>
+                <a:spcPts val="1680"/>
+              </a:lnSpc>
+              <a:spcBef>
+                <a:spcPts val="300"/>
+              </a:spcBef>
+              <a:spcAft>
+                <a:spcPts val="300"/>
+              </a:spcAft>
+              <a:buNone/>
+            </a:pPr>
+            <a:r>
+              <a:rPr lang="en-US" sz="1200" dirty="0">
+                <a:solidFill>
+                  <a:srgbClr val="1C2833"/>
+                </a:solidFill>
+                <a:latin typeface="Arial" pitchFamily="34" charset="0"/>
+                <a:ea typeface="Arial" pitchFamily="34" charset="-122"/>
+                <a:cs typeface="Arial" pitchFamily="34" charset="-120"/>
+              </a:rPr>
+              <a:t>Middle ·  · IKS Curriculum</a:t>
+            </a:r>
+            <a:endParaRPr lang="en-US" sz="1200" dirty="0"/>
+          </a:p>
+        </p:txBody>
+      </p:sp>
+    </p:spTree>
+  </p:cSld>
+  <p:clrMapOvr>
+    <a:masterClrMapping/>
+  </p:clrMapOvr>
+</p:sld>
+</file>
+
+<file path=ppt/slides/slide17.xml><?xml version="1.0" encoding="utf-8"?>
+<p:sld xmlns:a="http://schemas.openxmlformats.org/drawingml/2006/main" xmlns:r="http://schemas.openxmlformats.org/officeDocument/2006/relationships" xmlns:p="http://schemas.openxmlformats.org/presentationml/2006/main">
+  <p:cSld name="Slide 17">
+    <p:bg>
+      <p:bgPr>
+        <a:solidFill>
+          <a:srgbClr val="FFFFFF"/>
+        </a:solidFill>
+      </p:bgPr>
+    </p:bg>
+    <p:spTree>
+      <p:nvGrpSpPr>
+        <p:cNvPr id="1" name=""/>
+        <p:cNvGrpSpPr/>
+        <p:nvPr/>
+      </p:nvGrpSpPr>
+      <p:grpSpPr>
+        <a:xfrm>
+          <a:off x="0" y="0"/>
+          <a:ext cx="0" cy="0"/>
+          <a:chOff x="0" y="0"/>
+          <a:chExt cx="0" cy="0"/>
+        </a:xfrm>
+      </p:grpSpPr>
+      <p:sp>
+        <p:nvSpPr>
+          <p:cNvPr id="2" name="Text 0"/>
+          <p:cNvSpPr/>
+          <p:nvPr/>
+        </p:nvSpPr>
+        <p:spPr>
+          <a:xfrm>
+            <a:off x="0" y="0"/>
+            <a:ext cx="9144000" cy="101501"/>
+          </a:xfrm>
+          <a:prstGeom prst="rect">
+            <a:avLst/>
+          </a:prstGeom>
+          <a:solidFill>
+            <a:srgbClr val="277884"/>
+          </a:solidFill>
+          <a:ln/>
+        </p:spPr>
+        <p:txBody>
+          <a:bodyPr wrap="square" rtlCol="0" anchor="ctr"/>
+          <a:lstStyle/>
+          <a:p>
+            <a:pPr indent="0" marL="0">
+              <a:buNone/>
+            </a:pPr>
+            <a:endParaRPr lang="en-US" dirty="0"/>
+          </a:p>
+        </p:txBody>
+      </p:sp>
+      <p:sp>
+        <p:nvSpPr>
+          <p:cNvPr id="3" name="Text 1"/>
+          <p:cNvSpPr/>
+          <p:nvPr/>
+        </p:nvSpPr>
+        <p:spPr>
+          <a:xfrm>
+            <a:off x="406301" y="457051"/>
+            <a:ext cx="8498026" cy="274290"/>
+          </a:xfrm>
+          <a:prstGeom prst="rect">
+            <a:avLst/>
+          </a:prstGeom>
+          <a:noFill/>
+          <a:ln/>
+        </p:spPr>
+        <p:txBody>
+          <a:bodyPr wrap="square" lIns="0" tIns="0" rIns="0" bIns="0" rtlCol="0" anchor="t"/>
+          <a:lstStyle/>
+          <a:p>
+            <a:pPr algn="l" indent="0" marL="0">
+              <a:lnSpc>
+                <a:spcPts val="2160"/>
+              </a:lnSpc>
+              <a:spcBef>
+                <a:spcPts val="600"/>
+              </a:spcBef>
+              <a:spcAft>
+                <a:spcPts val="800"/>
+              </a:spcAft>
+              <a:buNone/>
+            </a:pPr>
+            <a:r>
+              <a:rPr lang="en-US" sz="1800" b="1" dirty="0">
+                <a:solidFill>
+                  <a:srgbClr val="FE4447"/>
+                </a:solidFill>
+                <a:latin typeface="Georgia" pitchFamily="34" charset="0"/>
+                <a:ea typeface="Georgia" pitchFamily="34" charset="-122"/>
+                <a:cs typeface="Georgia" pitchFamily="34" charset="-120"/>
+              </a:rPr>
+              <a:t>Teacher notes</a:t>
+            </a:r>
+            <a:endParaRPr lang="en-US" sz="1800" dirty="0"/>
+          </a:p>
+        </p:txBody>
+      </p:sp>
+      <p:sp>
+        <p:nvSpPr>
+          <p:cNvPr id="4" name="Text 2"/>
+          <p:cNvSpPr/>
+          <p:nvPr/>
+        </p:nvSpPr>
+        <p:spPr>
+          <a:xfrm>
+            <a:off x="634901" y="883593"/>
+            <a:ext cx="8102798" cy="731341"/>
+          </a:xfrm>
+          <a:prstGeom prst="rect">
+            <a:avLst/>
+          </a:prstGeom>
+          <a:noFill/>
+          <a:ln/>
+        </p:spPr>
+        <p:txBody>
+          <a:bodyPr wrap="square" lIns="0" tIns="0" rIns="0" bIns="0" rtlCol="0" anchor="t"/>
+          <a:lstStyle/>
+          <a:p>
+            <a:pPr algn="l" marL="342900" indent="-342900">
+              <a:lnSpc>
+                <a:spcPts val="1620"/>
+              </a:lnSpc>
+              <a:spcAft>
+                <a:spcPts val="300"/>
+              </a:spcAft>
+              <a:buSzPct val="100000"/>
+              <a:buChar char="•"/>
+            </a:pPr>
+            <a:r>
+              <a:rPr lang="en-US" sz="1200" dirty="0">
+                <a:solidFill>
+                  <a:srgbClr val="1C2833"/>
+                </a:solidFill>
+                <a:latin typeface="Arial" pitchFamily="34" charset="0"/>
+                <a:ea typeface="Arial" pitchFamily="34" charset="-122"/>
+                <a:cs typeface="Arial" pitchFamily="34" charset="-120"/>
+              </a:rPr>
+              <a:t>The "brāhma muhūrta wake time" is </a:t>
+            </a:r>
+            <a:pPr algn="l" indent="0" marL="0">
+              <a:lnSpc>
+                <a:spcPts val="1620"/>
+              </a:lnSpc>
+              <a:spcAft>
+                <a:spcPts val="300"/>
+              </a:spcAft>
+              <a:buNone/>
+            </a:pPr>
+            <a:r>
+              <a:rPr lang="en-US" sz="1200" i="1" dirty="0">
+                <a:solidFill>
+                  <a:srgbClr val="1C2833"/>
+                </a:solidFill>
+                <a:latin typeface="Arial" pitchFamily="34" charset="0"/>
+                <a:ea typeface="Arial" pitchFamily="34" charset="-122"/>
+                <a:cs typeface="Arial" pitchFamily="34" charset="-120"/>
+              </a:rPr>
+              <a:t>traditionally</a:t>
+            </a:r>
+            <a:pPr algn="l" indent="0" marL="0">
+              <a:lnSpc>
+                <a:spcPts val="1620"/>
+              </a:lnSpc>
+              <a:spcAft>
+                <a:spcPts val="300"/>
+              </a:spcAft>
+              <a:buNone/>
+            </a:pPr>
+            <a:r>
+              <a:rPr lang="en-US" sz="1200" dirty="0">
+                <a:solidFill>
+                  <a:srgbClr val="1C2833"/>
+                </a:solidFill>
+                <a:latin typeface="Arial" pitchFamily="34" charset="0"/>
+                <a:ea typeface="Arial" pitchFamily="34" charset="-122"/>
+                <a:cs typeface="Arial" pitchFamily="34" charset="-120"/>
+              </a:rPr>
+              <a:t> recommended but unrealistic for many students. Don't push.</a:t>
+            </a:r>
+            <a:endParaRPr lang="en-US" sz="1200" dirty="0"/>
+          </a:p>
+          <a:p>
+            <a:pPr algn="l" marL="342900" indent="-342900">
+              <a:lnSpc>
+                <a:spcPts val="1620"/>
+              </a:lnSpc>
+              <a:spcAft>
+                <a:spcPts val="300"/>
+              </a:spcAft>
+              <a:buSzPct val="100000"/>
+              <a:buChar char="•"/>
+            </a:pPr>
+            <a:r>
+              <a:rPr lang="en-US" sz="1200" dirty="0">
+                <a:solidFill>
+                  <a:srgbClr val="1C2833"/>
+                </a:solidFill>
+                <a:latin typeface="Arial" pitchFamily="34" charset="0"/>
+                <a:ea typeface="Arial" pitchFamily="34" charset="-122"/>
+                <a:cs typeface="Arial" pitchFamily="34" charset="-120"/>
+              </a:rPr>
+              <a:t>The science overlap is real; don't oversell ("Ayurveda predicted everything"). The honest framing: "tradition observed; science measured; they agree on much."</a:t>
+            </a:r>
+            <a:endParaRPr lang="en-US" sz="1200" dirty="0"/>
+          </a:p>
+        </p:txBody>
+      </p:sp>
+      <p:sp>
+        <p:nvSpPr>
+          <p:cNvPr id="5" name="Text 3"/>
+          <p:cNvSpPr/>
+          <p:nvPr/>
+        </p:nvSpPr>
+        <p:spPr>
+          <a:xfrm>
+            <a:off x="406301" y="4434929"/>
+            <a:ext cx="8498026" cy="213271"/>
+          </a:xfrm>
+          <a:prstGeom prst="rect">
+            <a:avLst/>
+          </a:prstGeom>
+          <a:noFill/>
+          <a:ln/>
+        </p:spPr>
+        <p:txBody>
+          <a:bodyPr wrap="square" lIns="0" tIns="0" rIns="0" bIns="0" rtlCol="0" anchor="t"/>
+          <a:lstStyle/>
+          <a:p>
+            <a:pPr algn="l" indent="0" marL="0">
+              <a:lnSpc>
+                <a:spcPts val="1680"/>
+              </a:lnSpc>
+              <a:spcBef>
+                <a:spcPts val="300"/>
+              </a:spcBef>
+              <a:spcAft>
+                <a:spcPts val="300"/>
+              </a:spcAft>
+              <a:buNone/>
+            </a:pPr>
+            <a:r>
+              <a:rPr lang="en-US" sz="1200" dirty="0">
+                <a:solidFill>
+                  <a:srgbClr val="1C2833"/>
+                </a:solidFill>
+                <a:latin typeface="Arial" pitchFamily="34" charset="0"/>
+                <a:ea typeface="Arial" pitchFamily="34" charset="-122"/>
+                <a:cs typeface="Arial" pitchFamily="34" charset="-120"/>
+              </a:rPr>
+              <a:t>Middle ·  · IKS Curriculum</a:t>
+            </a:r>
+            <a:endParaRPr lang="en-US" sz="1200" dirty="0"/>
+          </a:p>
+        </p:txBody>
+      </p:sp>
+    </p:spTree>
+  </p:cSld>
+  <p:clrMapOvr>
+    <a:masterClrMapping/>
+  </p:clrMapOvr>
+</p:sld>
+</file>
+
+<file path=ppt/slides/slide18.xml><?xml version="1.0" encoding="utf-8"?>
+<p:sld xmlns:a="http://schemas.openxmlformats.org/drawingml/2006/main" xmlns:r="http://schemas.openxmlformats.org/officeDocument/2006/relationships" xmlns:p="http://schemas.openxmlformats.org/presentationml/2006/main">
+  <p:cSld name="Slide 18">
+    <p:bg>
+      <p:bgPr>
+        <a:solidFill>
+          <a:srgbClr val="FFFFFF"/>
+        </a:solidFill>
+      </p:bgPr>
+    </p:bg>
+    <p:spTree>
+      <p:nvGrpSpPr>
+        <p:cNvPr id="1" name=""/>
+        <p:cNvGrpSpPr/>
+        <p:nvPr/>
+      </p:nvGrpSpPr>
+      <p:grpSpPr>
+        <a:xfrm>
+          <a:off x="0" y="0"/>
+          <a:ext cx="0" cy="0"/>
+          <a:chOff x="0" y="0"/>
+          <a:chExt cx="0" cy="0"/>
+        </a:xfrm>
+      </p:grpSpPr>
+      <p:sp>
+        <p:nvSpPr>
+          <p:cNvPr id="2" name="Text 0"/>
+          <p:cNvSpPr/>
+          <p:nvPr/>
+        </p:nvSpPr>
+        <p:spPr>
+          <a:xfrm>
+            <a:off x="0" y="0"/>
+            <a:ext cx="9144000" cy="101501"/>
+          </a:xfrm>
+          <a:prstGeom prst="rect">
+            <a:avLst/>
+          </a:prstGeom>
+          <a:solidFill>
+            <a:srgbClr val="277884"/>
+          </a:solidFill>
+          <a:ln/>
+        </p:spPr>
+        <p:txBody>
+          <a:bodyPr wrap="square" rtlCol="0" anchor="ctr"/>
+          <a:lstStyle/>
+          <a:p>
+            <a:pPr indent="0" marL="0">
+              <a:buNone/>
+            </a:pPr>
+            <a:endParaRPr lang="en-US" dirty="0"/>
+          </a:p>
+        </p:txBody>
+      </p:sp>
+      <p:sp>
+        <p:nvSpPr>
+          <p:cNvPr id="3" name="Text 1"/>
+          <p:cNvSpPr/>
+          <p:nvPr/>
+        </p:nvSpPr>
+        <p:spPr>
+          <a:xfrm>
+            <a:off x="406301" y="457051"/>
+            <a:ext cx="8498026" cy="274290"/>
+          </a:xfrm>
+          <a:prstGeom prst="rect">
+            <a:avLst/>
+          </a:prstGeom>
+          <a:noFill/>
+          <a:ln/>
+        </p:spPr>
+        <p:txBody>
+          <a:bodyPr wrap="square" lIns="0" tIns="0" rIns="0" bIns="0" rtlCol="0" anchor="t"/>
+          <a:lstStyle/>
+          <a:p>
+            <a:pPr algn="l" indent="0" marL="0">
+              <a:lnSpc>
+                <a:spcPts val="2160"/>
+              </a:lnSpc>
+              <a:spcBef>
+                <a:spcPts val="600"/>
+              </a:spcBef>
+              <a:spcAft>
+                <a:spcPts val="800"/>
+              </a:spcAft>
+              <a:buNone/>
+            </a:pPr>
+            <a:r>
+              <a:rPr lang="en-US" sz="1800" b="1" dirty="0">
+                <a:solidFill>
+                  <a:srgbClr val="FE4447"/>
+                </a:solidFill>
+                <a:latin typeface="Georgia" pitchFamily="34" charset="0"/>
+                <a:ea typeface="Georgia" pitchFamily="34" charset="-122"/>
+                <a:cs typeface="Georgia" pitchFamily="34" charset="-120"/>
+              </a:rPr>
+              <a:t>Citation(s) used</a:t>
+            </a:r>
+            <a:endParaRPr lang="en-US" sz="1800" dirty="0"/>
+          </a:p>
+        </p:txBody>
+      </p:sp>
+      <p:sp>
+        <p:nvSpPr>
+          <p:cNvPr id="4" name="Text 2"/>
+          <p:cNvSpPr/>
+          <p:nvPr/>
+        </p:nvSpPr>
+        <p:spPr>
+          <a:xfrm>
+            <a:off x="634901" y="883593"/>
+            <a:ext cx="8102798" cy="544711"/>
+          </a:xfrm>
+          <a:prstGeom prst="rect">
+            <a:avLst/>
+          </a:prstGeom>
+          <a:noFill/>
+          <a:ln/>
+        </p:spPr>
+        <p:txBody>
+          <a:bodyPr wrap="square" lIns="0" tIns="0" rIns="0" bIns="0" rtlCol="0" anchor="t"/>
+          <a:lstStyle/>
+          <a:p>
+            <a:pPr algn="l" marL="342900" indent="-342900">
+              <a:lnSpc>
+                <a:spcPts val="1620"/>
+              </a:lnSpc>
+              <a:spcAft>
+                <a:spcPts val="300"/>
+              </a:spcAft>
+              <a:buSzPct val="100000"/>
+              <a:buChar char="•"/>
+            </a:pPr>
+            <a:r>
+              <a:rPr lang="en-US" sz="1200" dirty="0">
+                <a:solidFill>
+                  <a:srgbClr val="1C2833"/>
+                </a:solidFill>
+                <a:latin typeface="Arial" pitchFamily="34" charset="0"/>
+                <a:ea typeface="Arial" pitchFamily="34" charset="-122"/>
+                <a:cs typeface="Arial" pitchFamily="34" charset="-120"/>
+              </a:rPr>
+              <a:t>BG 6.17 — vidya-karana RAG cache </a:t>
+            </a:r>
+            <a:pPr algn="l" indent="0" marL="0">
+              <a:lnSpc>
+                <a:spcPts val="1620"/>
+              </a:lnSpc>
+              <a:spcAft>
+                <a:spcPts val="300"/>
+              </a:spcAft>
+              <a:buNone/>
+            </a:pPr>
+            <a:r>
+              <a:rPr lang="en-US" sz="1200" dirty="0">
+                <a:solidFill>
+                  <a:srgbClr val="1C2833"/>
+                </a:solidFill>
+                <a:latin typeface="Arial" pitchFamily="34" charset="0"/>
+                <a:ea typeface="Arial" pitchFamily="34" charset="-122"/>
+                <a:cs typeface="Arial" pitchFamily="34" charset="-120"/>
+              </a:rPr>
               <a:t>day-04-dinacharya.json#chunks[0]</a:t>
             </a:r>
             <a:pPr algn="l" indent="0" marL="0">
               <a:lnSpc>
-                <a:spcPts val="1680"/>
-              </a:lnSpc>
-              <a:spcBef>
-                <a:spcPts val="300"/>
-              </a:spcBef>
+                <a:spcPts val="1620"/>
+              </a:lnSpc>
               <a:spcAft>
                 <a:spcPts val="300"/>
               </a:spcAft>
@@ -2954,15 +5063,36 @@
                 <a:ea typeface="Arial" pitchFamily="34" charset="-122"/>
                 <a:cs typeface="Arial" pitchFamily="34" charset="-120"/>
               </a:rPr>
-              <a:t>. – Panda, S. (2018). </a:t>
-            </a:r>
-            <a:pPr algn="l" indent="0" marL="0">
-              <a:lnSpc>
-                <a:spcPts val="1680"/>
-              </a:lnSpc>
-              <a:spcBef>
-                <a:spcPts val="300"/>
-              </a:spcBef>
+              <a:t>.</a:t>
+            </a:r>
+            <a:endParaRPr lang="en-US" sz="1200" dirty="0"/>
+          </a:p>
+          <a:p>
+            <a:pPr algn="l" marL="342900" indent="-342900">
+              <a:lnSpc>
+                <a:spcPts val="1620"/>
+              </a:lnSpc>
+              <a:spcAft>
+                <a:spcPts val="300"/>
+              </a:spcAft>
+              <a:buSzPct val="100000"/>
+              <a:buChar char="•"/>
+            </a:pPr>
+            <a:r>
+              <a:rPr lang="en-US" sz="1200" dirty="0">
+                <a:solidFill>
+                  <a:srgbClr val="1C2833"/>
+                </a:solidFill>
+                <a:latin typeface="Arial" pitchFamily="34" charset="0"/>
+                <a:ea typeface="Arial" pitchFamily="34" charset="-122"/>
+                <a:cs typeface="Arial" pitchFamily="34" charset="-120"/>
+              </a:rPr>
+              <a:t>Panda, S. (2018). </a:t>
+            </a:r>
+            <a:pPr algn="l" indent="0" marL="0">
+              <a:lnSpc>
+                <a:spcPts val="1620"/>
+              </a:lnSpc>
               <a:spcAft>
                 <a:spcPts val="300"/>
               </a:spcAft>
@@ -2981,11 +5111,8 @@
             </a:r>
             <a:pPr algn="l" indent="0" marL="0">
               <a:lnSpc>
-                <a:spcPts val="1680"/>
-              </a:lnSpc>
-              <a:spcBef>
-                <a:spcPts val="300"/>
-              </a:spcBef>
+                <a:spcPts val="1620"/>
+              </a:lnSpc>
               <a:spcAft>
                 <a:spcPts val="300"/>
               </a:spcAft>
@@ -3158,7 +5285,7 @@
                 <a:ea typeface="Georgia" pitchFamily="34" charset="-122"/>
                 <a:cs typeface="Georgia" pitchFamily="34" charset="-120"/>
               </a:rPr>
-              <a:t>Materials</a:t>
+              <a:t>Learning objective</a:t>
             </a:r>
             <a:endParaRPr lang="en-US" sz="1800" dirty="0"/>
           </a:p>
@@ -3173,7 +5300,7 @@
         <p:spPr>
           <a:xfrm>
             <a:off x="406301" y="870942"/>
-            <a:ext cx="8498026" cy="213271"/>
+            <a:ext cx="8498026" cy="426541"/>
           </a:xfrm>
           <a:prstGeom prst="rect">
             <a:avLst/>
@@ -3206,7 +5333,53 @@
                 <a:ea typeface="Arial" pitchFamily="34" charset="-122"/>
                 <a:cs typeface="Arial" pitchFamily="34" charset="-120"/>
               </a:rPr>
-              <a:t>– Wall chart of dinacharya timeline – Whiteboard</a:t>
+              <a:t>Students recall the components of </a:t>
+            </a:r>
+            <a:pPr algn="l" indent="0" marL="0">
+              <a:lnSpc>
+                <a:spcPts val="1680"/>
+              </a:lnSpc>
+              <a:spcBef>
+                <a:spcPts val="300"/>
+              </a:spcBef>
+              <a:spcAft>
+                <a:spcPts val="300"/>
+              </a:spcAft>
+              <a:buNone/>
+            </a:pPr>
+            <a:r>
+              <a:rPr lang="en-US" sz="1200" i="1" dirty="0">
+                <a:solidFill>
+                  <a:srgbClr val="1C2833"/>
+                </a:solidFill>
+                <a:latin typeface="Arial" pitchFamily="34" charset="0"/>
+                <a:ea typeface="Arial" pitchFamily="34" charset="-122"/>
+                <a:cs typeface="Arial" pitchFamily="34" charset="-120"/>
+              </a:rPr>
+              <a:t>dinacharya</a:t>
+            </a:r>
+            <a:pPr algn="l" indent="0" marL="0">
+              <a:lnSpc>
+                <a:spcPts val="1680"/>
+              </a:lnSpc>
+              <a:spcBef>
+                <a:spcPts val="300"/>
+              </a:spcBef>
+              <a:spcAft>
+                <a:spcPts val="300"/>
+              </a:spcAft>
+              <a:buNone/>
+            </a:pPr>
+            <a:r>
+              <a:rPr lang="en-US" sz="1200" dirty="0">
+                <a:solidFill>
+                  <a:srgbClr val="1C2833"/>
+                </a:solidFill>
+                <a:latin typeface="Arial" pitchFamily="34" charset="0"/>
+                <a:ea typeface="Arial" pitchFamily="34" charset="-122"/>
+                <a:cs typeface="Arial" pitchFamily="34" charset="-120"/>
+              </a:rPr>
+              <a:t> (waking, oral hygiene, oil massage, exercise, meals, sleep) and articulate the principle behind each.</a:t>
             </a:r>
             <a:endParaRPr lang="en-US" sz="1200" dirty="0"/>
           </a:p>
@@ -3364,7 +5537,7 @@
                 <a:ea typeface="Georgia" pitchFamily="34" charset="-122"/>
                 <a:cs typeface="Georgia" pitchFamily="34" charset="-120"/>
               </a:rPr>
-              <a:t>Vocabulary</a:t>
+              <a:t>Materials</a:t>
             </a:r>
             <a:endParaRPr lang="en-US" sz="1800" dirty="0"/>
           </a:p>
@@ -3379,7 +5552,7 @@
         <p:spPr>
           <a:xfrm>
             <a:off x="634901" y="883593"/>
-            <a:ext cx="8102798" cy="1013222"/>
+            <a:ext cx="8102798" cy="525661"/>
           </a:xfrm>
           <a:prstGeom prst="rect">
             <a:avLst/>
@@ -3402,26 +5575,6 @@
               <a:buChar char="•"/>
             </a:pPr>
             <a:r>
-              <a:rPr lang="en-US" sz="1200" i="1" dirty="0">
-                <a:solidFill>
-                  <a:srgbClr val="1C2833"/>
-                </a:solidFill>
-                <a:latin typeface="Arial" pitchFamily="34" charset="0"/>
-                <a:ea typeface="Arial" pitchFamily="34" charset="-122"/>
-                <a:cs typeface="Arial" pitchFamily="34" charset="-120"/>
-              </a:rPr>
-              <a:t>Dinacharya</a:t>
-            </a:r>
-            <a:pPr algn="l" indent="0" marL="0">
-              <a:lnSpc>
-                <a:spcPts val="1620"/>
-              </a:lnSpc>
-              <a:spcAft>
-                <a:spcPts val="300"/>
-              </a:spcAft>
-              <a:buNone/>
-            </a:pPr>
-            <a:r>
               <a:rPr lang="en-US" sz="1200" dirty="0">
                 <a:solidFill>
                   <a:srgbClr val="1C2833"/>
@@ -3430,7 +5583,7 @@
                 <a:ea typeface="Arial" pitchFamily="34" charset="-122"/>
                 <a:cs typeface="Arial" pitchFamily="34" charset="-120"/>
               </a:rPr>
-              <a:t> — daily routine (literally "day's conduct")</a:t>
+              <a:t>Wall chart of dinacharya timeline</a:t>
             </a:r>
             <a:endParaRPr lang="en-US" sz="1200" dirty="0"/>
           </a:p>
@@ -3446,26 +5599,6 @@
               <a:buChar char="•"/>
             </a:pPr>
             <a:r>
-              <a:rPr lang="en-US" sz="1200" i="1" dirty="0">
-                <a:solidFill>
-                  <a:srgbClr val="1C2833"/>
-                </a:solidFill>
-                <a:latin typeface="Arial" pitchFamily="34" charset="0"/>
-                <a:ea typeface="Arial" pitchFamily="34" charset="-122"/>
-                <a:cs typeface="Arial" pitchFamily="34" charset="-120"/>
-              </a:rPr>
-              <a:t>Brāhma muhūrta</a:t>
-            </a:r>
-            <a:pPr algn="l" indent="0" marL="0">
-              <a:lnSpc>
-                <a:spcPts val="1620"/>
-              </a:lnSpc>
-              <a:spcAft>
-                <a:spcPts val="300"/>
-              </a:spcAft>
-              <a:buNone/>
-            </a:pPr>
-            <a:r>
               <a:rPr lang="en-US" sz="1200" dirty="0">
                 <a:solidFill>
                   <a:srgbClr val="1C2833"/>
@@ -3474,95 +5607,7 @@
                 <a:ea typeface="Arial" pitchFamily="34" charset="-122"/>
                 <a:cs typeface="Arial" pitchFamily="34" charset="-120"/>
               </a:rPr>
-              <a:t> — "Brahma's hour," ~96 min before sunrise (recommended wake time, traditionally)</a:t>
-            </a:r>
-            <a:endParaRPr lang="en-US" sz="1200" dirty="0"/>
-          </a:p>
-          <a:p>
-            <a:pPr algn="l" marL="342900" indent="-342900">
-              <a:lnSpc>
-                <a:spcPts val="1620"/>
-              </a:lnSpc>
-              <a:spcAft>
-                <a:spcPts val="300"/>
-              </a:spcAft>
-              <a:buSzPct val="100000"/>
-              <a:buChar char="•"/>
-            </a:pPr>
-            <a:r>
-              <a:rPr lang="en-US" sz="1200" i="1" dirty="0">
-                <a:solidFill>
-                  <a:srgbClr val="1C2833"/>
-                </a:solidFill>
-                <a:latin typeface="Arial" pitchFamily="34" charset="0"/>
-                <a:ea typeface="Arial" pitchFamily="34" charset="-122"/>
-                <a:cs typeface="Arial" pitchFamily="34" charset="-120"/>
-              </a:rPr>
-              <a:t>Abhyanga</a:t>
-            </a:r>
-            <a:pPr algn="l" indent="0" marL="0">
-              <a:lnSpc>
-                <a:spcPts val="1620"/>
-              </a:lnSpc>
-              <a:spcAft>
-                <a:spcPts val="300"/>
-              </a:spcAft>
-              <a:buNone/>
-            </a:pPr>
-            <a:r>
-              <a:rPr lang="en-US" sz="1200" dirty="0">
-                <a:solidFill>
-                  <a:srgbClr val="1C2833"/>
-                </a:solidFill>
-                <a:latin typeface="Arial" pitchFamily="34" charset="0"/>
-                <a:ea typeface="Arial" pitchFamily="34" charset="-122"/>
-                <a:cs typeface="Arial" pitchFamily="34" charset="-120"/>
-              </a:rPr>
-              <a:t> — oil self-massage</a:t>
-            </a:r>
-            <a:endParaRPr lang="en-US" sz="1200" dirty="0"/>
-          </a:p>
-          <a:p>
-            <a:pPr algn="l" marL="342900" indent="-342900">
-              <a:lnSpc>
-                <a:spcPts val="1620"/>
-              </a:lnSpc>
-              <a:spcAft>
-                <a:spcPts val="300"/>
-              </a:spcAft>
-              <a:buSzPct val="100000"/>
-              <a:buChar char="•"/>
-            </a:pPr>
-            <a:r>
-              <a:rPr lang="en-US" sz="1200" i="1" dirty="0">
-                <a:solidFill>
-                  <a:srgbClr val="1C2833"/>
-                </a:solidFill>
-                <a:latin typeface="Arial" pitchFamily="34" charset="0"/>
-                <a:ea typeface="Arial" pitchFamily="34" charset="-122"/>
-                <a:cs typeface="Arial" pitchFamily="34" charset="-120"/>
-              </a:rPr>
-              <a:t>Vyāyāma</a:t>
-            </a:r>
-            <a:pPr algn="l" indent="0" marL="0">
-              <a:lnSpc>
-                <a:spcPts val="1620"/>
-              </a:lnSpc>
-              <a:spcAft>
-                <a:spcPts val="300"/>
-              </a:spcAft>
-              <a:buNone/>
-            </a:pPr>
-            <a:r>
-              <a:rPr lang="en-US" sz="1200" dirty="0">
-                <a:solidFill>
-                  <a:srgbClr val="1C2833"/>
-                </a:solidFill>
-                <a:latin typeface="Arial" pitchFamily="34" charset="0"/>
-                <a:ea typeface="Arial" pitchFamily="34" charset="-122"/>
-                <a:cs typeface="Arial" pitchFamily="34" charset="-120"/>
-              </a:rPr>
-              <a:t> — exercise</a:t>
+              <a:t>Whiteboard</a:t>
             </a:r>
             <a:endParaRPr lang="en-US" sz="1200" dirty="0"/>
           </a:p>
@@ -3720,7 +5765,7 @@
                 <a:ea typeface="Georgia" pitchFamily="34" charset="-122"/>
                 <a:cs typeface="Georgia" pitchFamily="34" charset="-120"/>
               </a:rPr>
-              <a:t>Flow</a:t>
+              <a:t>Vocabulary</a:t>
             </a:r>
             <a:endParaRPr lang="en-US" sz="1800" dirty="0"/>
           </a:p>
@@ -3729,6 +5774,204 @@
       <p:sp>
         <p:nvSpPr>
           <p:cNvPr id="4" name="Text 2"/>
+          <p:cNvSpPr/>
+          <p:nvPr/>
+        </p:nvSpPr>
+        <p:spPr>
+          <a:xfrm>
+            <a:off x="634901" y="883593"/>
+            <a:ext cx="8102798" cy="1013222"/>
+          </a:xfrm>
+          <a:prstGeom prst="rect">
+            <a:avLst/>
+          </a:prstGeom>
+          <a:noFill/>
+          <a:ln/>
+        </p:spPr>
+        <p:txBody>
+          <a:bodyPr wrap="square" lIns="0" tIns="0" rIns="0" bIns="0" rtlCol="0" anchor="t"/>
+          <a:lstStyle/>
+          <a:p>
+            <a:pPr algn="l" marL="342900" indent="-342900">
+              <a:lnSpc>
+                <a:spcPts val="1620"/>
+              </a:lnSpc>
+              <a:spcAft>
+                <a:spcPts val="300"/>
+              </a:spcAft>
+              <a:buSzPct val="100000"/>
+              <a:buChar char="•"/>
+            </a:pPr>
+            <a:r>
+              <a:rPr lang="en-US" sz="1200" i="1" dirty="0">
+                <a:solidFill>
+                  <a:srgbClr val="1C2833"/>
+                </a:solidFill>
+                <a:latin typeface="Arial" pitchFamily="34" charset="0"/>
+                <a:ea typeface="Arial" pitchFamily="34" charset="-122"/>
+                <a:cs typeface="Arial" pitchFamily="34" charset="-120"/>
+              </a:rPr>
+              <a:t>Dinacharya</a:t>
+            </a:r>
+            <a:pPr algn="l" indent="0" marL="0">
+              <a:lnSpc>
+                <a:spcPts val="1620"/>
+              </a:lnSpc>
+              <a:spcAft>
+                <a:spcPts val="300"/>
+              </a:spcAft>
+              <a:buNone/>
+            </a:pPr>
+            <a:r>
+              <a:rPr lang="en-US" sz="1200" dirty="0">
+                <a:solidFill>
+                  <a:srgbClr val="1C2833"/>
+                </a:solidFill>
+                <a:latin typeface="Arial" pitchFamily="34" charset="0"/>
+                <a:ea typeface="Arial" pitchFamily="34" charset="-122"/>
+                <a:cs typeface="Arial" pitchFamily="34" charset="-120"/>
+              </a:rPr>
+              <a:t> — daily routine (literally "day's conduct")</a:t>
+            </a:r>
+            <a:endParaRPr lang="en-US" sz="1200" dirty="0"/>
+          </a:p>
+          <a:p>
+            <a:pPr algn="l" marL="342900" indent="-342900">
+              <a:lnSpc>
+                <a:spcPts val="1620"/>
+              </a:lnSpc>
+              <a:spcAft>
+                <a:spcPts val="300"/>
+              </a:spcAft>
+              <a:buSzPct val="100000"/>
+              <a:buChar char="•"/>
+            </a:pPr>
+            <a:r>
+              <a:rPr lang="en-US" sz="1200" i="1" dirty="0">
+                <a:solidFill>
+                  <a:srgbClr val="1C2833"/>
+                </a:solidFill>
+                <a:latin typeface="Arial" pitchFamily="34" charset="0"/>
+                <a:ea typeface="Arial" pitchFamily="34" charset="-122"/>
+                <a:cs typeface="Arial" pitchFamily="34" charset="-120"/>
+              </a:rPr>
+              <a:t>Brāhma muhūrta</a:t>
+            </a:r>
+            <a:pPr algn="l" indent="0" marL="0">
+              <a:lnSpc>
+                <a:spcPts val="1620"/>
+              </a:lnSpc>
+              <a:spcAft>
+                <a:spcPts val="300"/>
+              </a:spcAft>
+              <a:buNone/>
+            </a:pPr>
+            <a:r>
+              <a:rPr lang="en-US" sz="1200" dirty="0">
+                <a:solidFill>
+                  <a:srgbClr val="1C2833"/>
+                </a:solidFill>
+                <a:latin typeface="Arial" pitchFamily="34" charset="0"/>
+                <a:ea typeface="Arial" pitchFamily="34" charset="-122"/>
+                <a:cs typeface="Arial" pitchFamily="34" charset="-120"/>
+              </a:rPr>
+              <a:t> — "Brahma's hour," ~96 min before sunrise (recommended wake time, traditionally)</a:t>
+            </a:r>
+            <a:endParaRPr lang="en-US" sz="1200" dirty="0"/>
+          </a:p>
+          <a:p>
+            <a:pPr algn="l" marL="342900" indent="-342900">
+              <a:lnSpc>
+                <a:spcPts val="1620"/>
+              </a:lnSpc>
+              <a:spcAft>
+                <a:spcPts val="300"/>
+              </a:spcAft>
+              <a:buSzPct val="100000"/>
+              <a:buChar char="•"/>
+            </a:pPr>
+            <a:r>
+              <a:rPr lang="en-US" sz="1200" i="1" dirty="0">
+                <a:solidFill>
+                  <a:srgbClr val="1C2833"/>
+                </a:solidFill>
+                <a:latin typeface="Arial" pitchFamily="34" charset="0"/>
+                <a:ea typeface="Arial" pitchFamily="34" charset="-122"/>
+                <a:cs typeface="Arial" pitchFamily="34" charset="-120"/>
+              </a:rPr>
+              <a:t>Abhyanga</a:t>
+            </a:r>
+            <a:pPr algn="l" indent="0" marL="0">
+              <a:lnSpc>
+                <a:spcPts val="1620"/>
+              </a:lnSpc>
+              <a:spcAft>
+                <a:spcPts val="300"/>
+              </a:spcAft>
+              <a:buNone/>
+            </a:pPr>
+            <a:r>
+              <a:rPr lang="en-US" sz="1200" dirty="0">
+                <a:solidFill>
+                  <a:srgbClr val="1C2833"/>
+                </a:solidFill>
+                <a:latin typeface="Arial" pitchFamily="34" charset="0"/>
+                <a:ea typeface="Arial" pitchFamily="34" charset="-122"/>
+                <a:cs typeface="Arial" pitchFamily="34" charset="-120"/>
+              </a:rPr>
+              <a:t> — oil self-massage</a:t>
+            </a:r>
+            <a:endParaRPr lang="en-US" sz="1200" dirty="0"/>
+          </a:p>
+          <a:p>
+            <a:pPr algn="l" marL="342900" indent="-342900">
+              <a:lnSpc>
+                <a:spcPts val="1620"/>
+              </a:lnSpc>
+              <a:spcAft>
+                <a:spcPts val="300"/>
+              </a:spcAft>
+              <a:buSzPct val="100000"/>
+              <a:buChar char="•"/>
+            </a:pPr>
+            <a:r>
+              <a:rPr lang="en-US" sz="1200" i="1" dirty="0">
+                <a:solidFill>
+                  <a:srgbClr val="1C2833"/>
+                </a:solidFill>
+                <a:latin typeface="Arial" pitchFamily="34" charset="0"/>
+                <a:ea typeface="Arial" pitchFamily="34" charset="-122"/>
+                <a:cs typeface="Arial" pitchFamily="34" charset="-120"/>
+              </a:rPr>
+              <a:t>Vyāyāma</a:t>
+            </a:r>
+            <a:pPr algn="l" indent="0" marL="0">
+              <a:lnSpc>
+                <a:spcPts val="1620"/>
+              </a:lnSpc>
+              <a:spcAft>
+                <a:spcPts val="300"/>
+              </a:spcAft>
+              <a:buNone/>
+            </a:pPr>
+            <a:r>
+              <a:rPr lang="en-US" sz="1200" dirty="0">
+                <a:solidFill>
+                  <a:srgbClr val="1C2833"/>
+                </a:solidFill>
+                <a:latin typeface="Arial" pitchFamily="34" charset="0"/>
+                <a:ea typeface="Arial" pitchFamily="34" charset="-122"/>
+                <a:cs typeface="Arial" pitchFamily="34" charset="-120"/>
+              </a:rPr>
+              <a:t> — exercise</a:t>
+            </a:r>
+            <a:endParaRPr lang="en-US" sz="1200" dirty="0"/>
+          </a:p>
+        </p:txBody>
+      </p:sp>
+      <p:sp>
+        <p:nvSpPr>
+          <p:cNvPr id="5" name="Text 3"/>
           <p:cNvSpPr/>
           <p:nvPr/>
         </p:nvSpPr>
@@ -3878,7 +6121,7 @@
                 <a:ea typeface="Georgia" pitchFamily="34" charset="-122"/>
                 <a:cs typeface="Georgia" pitchFamily="34" charset="-120"/>
               </a:rPr>
-              <a:t>Warm-up (5 min)</a:t>
+              <a:t>Flow</a:t>
             </a:r>
             <a:endParaRPr lang="en-US" sz="1800" dirty="0"/>
           </a:p>
@@ -3887,54 +6130,6 @@
       <p:sp>
         <p:nvSpPr>
           <p:cNvPr id="4" name="Text 2"/>
-          <p:cNvSpPr/>
-          <p:nvPr/>
-        </p:nvSpPr>
-        <p:spPr>
-          <a:xfrm>
-            <a:off x="406301" y="870942"/>
-            <a:ext cx="8498026" cy="213271"/>
-          </a:xfrm>
-          <a:prstGeom prst="rect">
-            <a:avLst/>
-          </a:prstGeom>
-          <a:noFill/>
-          <a:ln/>
-        </p:spPr>
-        <p:txBody>
-          <a:bodyPr wrap="square" lIns="0" tIns="0" rIns="0" bIns="0" rtlCol="0" anchor="t"/>
-          <a:lstStyle/>
-          <a:p>
-            <a:pPr algn="l" indent="0" marL="0">
-              <a:lnSpc>
-                <a:spcPts val="1680"/>
-              </a:lnSpc>
-              <a:spcBef>
-                <a:spcPts val="300"/>
-              </a:spcBef>
-              <a:spcAft>
-                <a:spcPts val="300"/>
-              </a:spcAft>
-              <a:buNone/>
-            </a:pPr>
-            <a:r>
-              <a:rPr lang="en-US" sz="1200" dirty="0">
-                <a:solidFill>
-                  <a:srgbClr val="1C2833"/>
-                </a:solidFill>
-                <a:latin typeface="Arial" pitchFamily="34" charset="0"/>
-                <a:ea typeface="Arial" pitchFamily="34" charset="-122"/>
-                <a:cs typeface="Arial" pitchFamily="34" charset="-120"/>
-              </a:rPr>
-              <a:t>Daily prompt + recall: dosha balance principle from yesterday.</a:t>
-            </a:r>
-            <a:endParaRPr lang="en-US" sz="1200" dirty="0"/>
-          </a:p>
-        </p:txBody>
-      </p:sp>
-      <p:sp>
-        <p:nvSpPr>
-          <p:cNvPr id="5" name="Text 3"/>
           <p:cNvSpPr/>
           <p:nvPr/>
         </p:nvSpPr>
@@ -4084,7 +6279,7 @@
                 <a:ea typeface="Georgia" pitchFamily="34" charset="-122"/>
                 <a:cs typeface="Georgia" pitchFamily="34" charset="-120"/>
               </a:rPr>
-              <a:t>Read primary source (5 min)</a:t>
+              <a:t>Warm-up (5 min)</a:t>
             </a:r>
             <a:endParaRPr lang="en-US" sz="1800" dirty="0"/>
           </a:p>
@@ -4124,15 +6319,15 @@
               <a:buNone/>
             </a:pPr>
             <a:r>
-              <a:rPr lang="en-US" sz="1200" b="1" dirty="0">
-                <a:solidFill>
-                  <a:srgbClr val="1C2833"/>
-                </a:solidFill>
-                <a:latin typeface="Arial" pitchFamily="34" charset="0"/>
-                <a:ea typeface="Arial" pitchFamily="34" charset="-122"/>
-                <a:cs typeface="Arial" pitchFamily="34" charset="-120"/>
-              </a:rPr>
-              <a:t>BG 6.17:</a:t>
+              <a:rPr lang="en-US" sz="1200" dirty="0">
+                <a:solidFill>
+                  <a:srgbClr val="1C2833"/>
+                </a:solidFill>
+                <a:latin typeface="Arial" pitchFamily="34" charset="0"/>
+                <a:ea typeface="Arial" pitchFamily="34" charset="-122"/>
+                <a:cs typeface="Arial" pitchFamily="34" charset="-120"/>
+              </a:rPr>
+              <a:t>Daily prompt + recall: dosha balance principle from yesterday.</a:t>
             </a:r>
             <a:endParaRPr lang="en-US" sz="1200" dirty="0"/>
           </a:p>
@@ -4141,249 +6336,6 @@
       <p:sp>
         <p:nvSpPr>
           <p:cNvPr id="5" name="Text 3"/>
-          <p:cNvSpPr/>
-          <p:nvPr/>
-        </p:nvSpPr>
-        <p:spPr>
-          <a:xfrm>
-            <a:off x="406301" y="1173063"/>
-            <a:ext cx="8331398" cy="611981"/>
-          </a:xfrm>
-          <a:prstGeom prst="rect">
-            <a:avLst/>
-          </a:prstGeom>
-          <a:solidFill>
-            <a:srgbClr val="F4F8F9"/>
-          </a:solidFill>
-          <a:ln/>
-        </p:spPr>
-        <p:txBody>
-          <a:bodyPr wrap="square" rtlCol="0" anchor="ctr"/>
-          <a:lstStyle/>
-          <a:p>
-            <a:pPr indent="0" marL="0">
-              <a:buNone/>
-            </a:pPr>
-            <a:endParaRPr lang="en-US" dirty="0"/>
-          </a:p>
-        </p:txBody>
-      </p:sp>
-      <p:sp>
-        <p:nvSpPr>
-          <p:cNvPr id="6" name="Shape 4"/>
-          <p:cNvSpPr/>
-          <p:nvPr/>
-        </p:nvSpPr>
-        <p:spPr>
-          <a:xfrm>
-            <a:off x="434876" y="1173063"/>
-            <a:ext cx="0" cy="611981"/>
-          </a:xfrm>
-          <a:prstGeom prst="line">
-            <a:avLst/>
-          </a:prstGeom>
-          <a:noFill/>
-          <a:ln w="57150">
-            <a:solidFill>
-              <a:srgbClr val="FE4447"/>
-            </a:solidFill>
-            <a:prstDash val="solid"/>
-          </a:ln>
-        </p:spPr>
-      </p:sp>
-      <p:sp>
-        <p:nvSpPr>
-          <p:cNvPr id="7" name="Text 5"/>
-          <p:cNvSpPr/>
-          <p:nvPr/>
-        </p:nvSpPr>
-        <p:spPr>
-          <a:xfrm>
-            <a:off x="692051" y="1363563"/>
-            <a:ext cx="7973389" cy="230981"/>
-          </a:xfrm>
-          <a:prstGeom prst="rect">
-            <a:avLst/>
-          </a:prstGeom>
-          <a:noFill/>
-          <a:ln/>
-        </p:spPr>
-        <p:txBody>
-          <a:bodyPr wrap="square" lIns="0" tIns="0" rIns="0" bIns="0" rtlCol="0" anchor="t"/>
-          <a:lstStyle/>
-          <a:p>
-            <a:pPr algn="l" indent="0" marL="0">
-              <a:lnSpc>
-                <a:spcPts val="1820"/>
-              </a:lnSpc>
-              <a:spcBef>
-                <a:spcPts val="300"/>
-              </a:spcBef>
-              <a:spcAft>
-                <a:spcPts val="300"/>
-              </a:spcAft>
-              <a:buNone/>
-            </a:pPr>
-            <a:r>
-              <a:rPr lang="en-US" sz="1300" i="1" dirty="0">
-                <a:solidFill>
-                  <a:srgbClr val="1C2833"/>
-                </a:solidFill>
-                <a:latin typeface="Georgia" pitchFamily="34" charset="0"/>
-                <a:ea typeface="Georgia" pitchFamily="34" charset="-122"/>
-                <a:cs typeface="Georgia" pitchFamily="34" charset="-120"/>
-              </a:rPr>
-              <a:t>yuktāhāra-vihārasya yukta-ceṣṭasya karmasu</a:t>
-            </a:r>
-            <a:pPr algn="l" indent="0" marL="0">
-              <a:lnSpc>
-                <a:spcPts val="1820"/>
-              </a:lnSpc>
-              <a:spcBef>
-                <a:spcPts val="300"/>
-              </a:spcBef>
-              <a:spcAft>
-                <a:spcPts val="300"/>
-              </a:spcAft>
-              <a:buNone/>
-            </a:pPr>
-            <a:r>
-              <a:rPr lang="en-US" sz="1300" dirty="0">
-                <a:solidFill>
-                  <a:srgbClr val="1C2833"/>
-                </a:solidFill>
-                <a:latin typeface="Georgia" pitchFamily="34" charset="0"/>
-                <a:ea typeface="Georgia" pitchFamily="34" charset="-122"/>
-                <a:cs typeface="Georgia" pitchFamily="34" charset="-120"/>
-              </a:rPr>
-              <a:t> </a:t>
-            </a:r>
-            <a:pPr algn="l" indent="0" marL="0">
-              <a:lnSpc>
-                <a:spcPts val="1820"/>
-              </a:lnSpc>
-              <a:spcBef>
-                <a:spcPts val="300"/>
-              </a:spcBef>
-              <a:spcAft>
-                <a:spcPts val="300"/>
-              </a:spcAft>
-              <a:buNone/>
-            </a:pPr>
-            <a:r>
-              <a:rPr lang="en-US" sz="1300" i="1" dirty="0">
-                <a:solidFill>
-                  <a:srgbClr val="1C2833"/>
-                </a:solidFill>
-                <a:latin typeface="Georgia" pitchFamily="34" charset="0"/>
-                <a:ea typeface="Georgia" pitchFamily="34" charset="-122"/>
-                <a:cs typeface="Georgia" pitchFamily="34" charset="-120"/>
-              </a:rPr>
-              <a:t>yukta-svapnāvabodhasya yogo bhavati duḥkha-hā</a:t>
-            </a:r>
-            <a:endParaRPr lang="en-US" sz="1300" dirty="0"/>
-          </a:p>
-        </p:txBody>
-      </p:sp>
-      <p:sp>
-        <p:nvSpPr>
-          <p:cNvPr id="8" name="Text 6"/>
-          <p:cNvSpPr/>
-          <p:nvPr/>
-        </p:nvSpPr>
-        <p:spPr>
-          <a:xfrm>
-            <a:off x="406301" y="1873895"/>
-            <a:ext cx="8498026" cy="213271"/>
-          </a:xfrm>
-          <a:prstGeom prst="rect">
-            <a:avLst/>
-          </a:prstGeom>
-          <a:noFill/>
-          <a:ln/>
-        </p:spPr>
-        <p:txBody>
-          <a:bodyPr wrap="square" lIns="0" tIns="0" rIns="0" bIns="0" rtlCol="0" anchor="t"/>
-          <a:lstStyle/>
-          <a:p>
-            <a:pPr algn="l" indent="0" marL="0">
-              <a:lnSpc>
-                <a:spcPts val="1680"/>
-              </a:lnSpc>
-              <a:spcBef>
-                <a:spcPts val="300"/>
-              </a:spcBef>
-              <a:spcAft>
-                <a:spcPts val="300"/>
-              </a:spcAft>
-              <a:buNone/>
-            </a:pPr>
-            <a:r>
-              <a:rPr lang="en-US" sz="1200" dirty="0">
-                <a:solidFill>
-                  <a:srgbClr val="1C2833"/>
-                </a:solidFill>
-                <a:latin typeface="Arial" pitchFamily="34" charset="0"/>
-                <a:ea typeface="Arial" pitchFamily="34" charset="-122"/>
-                <a:cs typeface="Arial" pitchFamily="34" charset="-120"/>
-              </a:rPr>
-              <a:t>"He who is regulated in eating, recreation, work, sleep, and waking can mitigate sorrow."</a:t>
-            </a:r>
-            <a:endParaRPr lang="en-US" sz="1200" dirty="0"/>
-          </a:p>
-        </p:txBody>
-      </p:sp>
-      <p:sp>
-        <p:nvSpPr>
-          <p:cNvPr id="9" name="Text 7"/>
-          <p:cNvSpPr/>
-          <p:nvPr/>
-        </p:nvSpPr>
-        <p:spPr>
-          <a:xfrm>
-            <a:off x="406301" y="2163366"/>
-            <a:ext cx="8498026" cy="213271"/>
-          </a:xfrm>
-          <a:prstGeom prst="rect">
-            <a:avLst/>
-          </a:prstGeom>
-          <a:noFill/>
-          <a:ln/>
-        </p:spPr>
-        <p:txBody>
-          <a:bodyPr wrap="square" lIns="0" tIns="0" rIns="0" bIns="0" rtlCol="0" anchor="t"/>
-          <a:lstStyle/>
-          <a:p>
-            <a:pPr algn="l" indent="0" marL="0">
-              <a:lnSpc>
-                <a:spcPts val="1680"/>
-              </a:lnSpc>
-              <a:spcBef>
-                <a:spcPts val="300"/>
-              </a:spcBef>
-              <a:spcAft>
-                <a:spcPts val="300"/>
-              </a:spcAft>
-              <a:buNone/>
-            </a:pPr>
-            <a:r>
-              <a:rPr lang="en-US" sz="1200" dirty="0">
-                <a:solidFill>
-                  <a:srgbClr val="1C2833"/>
-                </a:solidFill>
-                <a:latin typeface="Arial" pitchFamily="34" charset="0"/>
-                <a:ea typeface="Arial" pitchFamily="34" charset="-122"/>
-                <a:cs typeface="Arial" pitchFamily="34" charset="-120"/>
-              </a:rPr>
-              <a:t>(Read aloud once. Won't fully analyse today — that's Day 7.)</a:t>
-            </a:r>
-            <a:endParaRPr lang="en-US" sz="1200" dirty="0"/>
-          </a:p>
-        </p:txBody>
-      </p:sp>
-      <p:sp>
-        <p:nvSpPr>
-          <p:cNvPr id="10" name="Text 8"/>
           <p:cNvSpPr/>
           <p:nvPr/>
         </p:nvSpPr>
@@ -4533,7 +6485,7 @@
                 <a:ea typeface="Georgia" pitchFamily="34" charset="-122"/>
                 <a:cs typeface="Georgia" pitchFamily="34" charset="-120"/>
               </a:rPr>
-              <a:t>Activity (8 min) — Map your dinacharya</a:t>
+              <a:t>Core (25 min)</a:t>
             </a:r>
             <a:endParaRPr lang="en-US" sz="1800" dirty="0"/>
           </a:p>
@@ -4547,8 +6499,8 @@
         </p:nvSpPr>
         <p:spPr>
           <a:xfrm>
-            <a:off x="406301" y="870942"/>
-            <a:ext cx="8498026" cy="426541"/>
+            <a:off x="634901" y="883593"/>
+            <a:ext cx="8102798" cy="281880"/>
           </a:xfrm>
           <a:prstGeom prst="rect">
             <a:avLst/>
@@ -4560,6 +6512,72 @@
           <a:bodyPr wrap="square" lIns="0" tIns="0" rIns="0" bIns="0" rtlCol="0" anchor="t"/>
           <a:lstStyle/>
           <a:p>
+            <a:pPr algn="l" marL="342900" indent="-342900">
+              <a:lnSpc>
+                <a:spcPts val="1620"/>
+              </a:lnSpc>
+              <a:spcAft>
+                <a:spcPts val="300"/>
+              </a:spcAft>
+              <a:buSzPct val="100000"/>
+              <a:buChar char="•"/>
+            </a:pPr>
+            <a:r>
+              <a:rPr lang="en-US" sz="1200" b="1" dirty="0">
+                <a:solidFill>
+                  <a:srgbClr val="1C2833"/>
+                </a:solidFill>
+                <a:latin typeface="Arial" pitchFamily="34" charset="0"/>
+                <a:ea typeface="Arial" pitchFamily="34" charset="-122"/>
+                <a:cs typeface="Arial" pitchFamily="34" charset="-120"/>
+              </a:rPr>
+              <a:t>The dinacharya timeline</a:t>
+            </a:r>
+            <a:pPr algn="l" indent="0" marL="0">
+              <a:lnSpc>
+                <a:spcPts val="1620"/>
+              </a:lnSpc>
+              <a:spcAft>
+                <a:spcPts val="300"/>
+              </a:spcAft>
+              <a:buNone/>
+            </a:pPr>
+            <a:r>
+              <a:rPr lang="en-US" sz="1200" dirty="0">
+                <a:solidFill>
+                  <a:srgbClr val="1C2833"/>
+                </a:solidFill>
+                <a:latin typeface="Arial" pitchFamily="34" charset="0"/>
+                <a:ea typeface="Arial" pitchFamily="34" charset="-122"/>
+                <a:cs typeface="Arial" pitchFamily="34" charset="-120"/>
+              </a:rPr>
+              <a:t> (build on the board, in order):</a:t>
+            </a:r>
+            <a:endParaRPr lang="en-US" sz="1200" dirty="0"/>
+          </a:p>
+        </p:txBody>
+      </p:sp>
+      <p:sp>
+        <p:nvSpPr>
+          <p:cNvPr id="5" name="Text 3"/>
+          <p:cNvSpPr/>
+          <p:nvPr/>
+        </p:nvSpPr>
+        <p:spPr>
+          <a:xfrm>
+            <a:off x="406301" y="1254323"/>
+            <a:ext cx="8498026" cy="213271"/>
+          </a:xfrm>
+          <a:prstGeom prst="rect">
+            <a:avLst/>
+          </a:prstGeom>
+          <a:noFill/>
+          <a:ln/>
+        </p:spPr>
+        <p:txBody>
+          <a:bodyPr wrap="square" lIns="0" tIns="0" rIns="0" bIns="0" rtlCol="0" anchor="t"/>
+          <a:lstStyle/>
+          <a:p>
             <a:pPr algn="l" indent="0" marL="0">
               <a:lnSpc>
                 <a:spcPts val="1680"/>
@@ -4573,15 +6591,15 @@
               <a:buNone/>
             </a:pPr>
             <a:r>
-              <a:rPr lang="en-US" sz="1200" dirty="0">
-                <a:solidFill>
-                  <a:srgbClr val="1C2833"/>
-                </a:solidFill>
-                <a:latin typeface="Arial" pitchFamily="34" charset="0"/>
-                <a:ea typeface="Arial" pitchFamily="34" charset="-122"/>
-                <a:cs typeface="Arial" pitchFamily="34" charset="-120"/>
-              </a:rPr>
-              <a:t>Each student writes their CURRENT daily routine in the dinacharya timeline format. Notice where it aligns and where it doesn't.</a:t>
+              <a:rPr lang="en-US" sz="1200" i="1" dirty="0">
+                <a:solidFill>
+                  <a:srgbClr val="1C2833"/>
+                </a:solidFill>
+                <a:latin typeface="Arial" pitchFamily="34" charset="0"/>
+                <a:ea typeface="Arial" pitchFamily="34" charset="-122"/>
+                <a:cs typeface="Arial" pitchFamily="34" charset="-120"/>
+              </a:rPr>
+              <a:t>Each row: Time · Practice · Why.</a:t>
             </a:r>
             <a:endParaRPr lang="en-US" sz="1200" dirty="0"/>
           </a:p>
@@ -4589,7 +6607,7 @@
       </p:sp>
       <p:sp>
         <p:nvSpPr>
-          <p:cNvPr id="5" name="Text 3"/>
+          <p:cNvPr id="6" name="Text 4"/>
           <p:cNvSpPr/>
           <p:nvPr/>
         </p:nvSpPr>
@@ -4739,7 +6757,7 @@
                 <a:ea typeface="Georgia" pitchFamily="34" charset="-122"/>
                 <a:cs typeface="Georgia" pitchFamily="34" charset="-120"/>
               </a:rPr>
-              <a:t>Wrap-up (2 min)</a:t>
+              <a:t>Core (25 min) (cont.)</a:t>
             </a:r>
             <a:endParaRPr lang="en-US" sz="1800" dirty="0"/>
           </a:p>
@@ -4753,8 +6771,8 @@
         </p:nvSpPr>
         <p:spPr>
           <a:xfrm>
-            <a:off x="406301" y="870942"/>
-            <a:ext cx="8498026" cy="213271"/>
+            <a:off x="634901" y="883593"/>
+            <a:ext cx="8102798" cy="1500783"/>
           </a:xfrm>
           <a:prstGeom prst="rect">
             <a:avLst/>
@@ -4766,13 +6784,31 @@
           <a:bodyPr wrap="square" lIns="0" tIns="0" rIns="0" bIns="0" rtlCol="0" anchor="t"/>
           <a:lstStyle/>
           <a:p>
-            <a:pPr algn="l" indent="0" marL="0">
-              <a:lnSpc>
-                <a:spcPts val="1680"/>
-              </a:lnSpc>
-              <a:spcBef>
-                <a:spcPts val="300"/>
-              </a:spcBef>
+            <a:pPr algn="l" marL="342900" indent="-342900">
+              <a:lnSpc>
+                <a:spcPts val="1620"/>
+              </a:lnSpc>
+              <a:spcAft>
+                <a:spcPts val="300"/>
+              </a:spcAft>
+              <a:buSzPct val="100000"/>
+              <a:buChar char="•"/>
+            </a:pPr>
+            <a:r>
+              <a:rPr lang="en-US" sz="1200" b="1" dirty="0">
+                <a:solidFill>
+                  <a:srgbClr val="1C2833"/>
+                </a:solidFill>
+                <a:latin typeface="Arial" pitchFamily="34" charset="0"/>
+                <a:ea typeface="Arial" pitchFamily="34" charset="-122"/>
+                <a:cs typeface="Arial" pitchFamily="34" charset="-120"/>
+              </a:rPr>
+              <a:t>Brāhma muhūrta (before sunrise)</a:t>
+            </a:r>
+            <a:pPr algn="l" indent="0" marL="0">
+              <a:lnSpc>
+                <a:spcPts val="1620"/>
+              </a:lnSpc>
               <a:spcAft>
                 <a:spcPts val="300"/>
               </a:spcAft>
@@ -4787,30 +6823,227 @@
                 <a:ea typeface="Arial" pitchFamily="34" charset="-122"/>
                 <a:cs typeface="Arial" pitchFamily="34" charset="-120"/>
               </a:rPr>
-              <a:t>– Preview Day 5: </a:t>
-            </a:r>
-            <a:pPr algn="l" indent="0" marL="0">
-              <a:lnSpc>
-                <a:spcPts val="1680"/>
-              </a:lnSpc>
-              <a:spcBef>
-                <a:spcPts val="300"/>
-              </a:spcBef>
-              <a:spcAft>
-                <a:spcPts val="300"/>
-              </a:spcAft>
-              <a:buNone/>
-            </a:pPr>
-            <a:r>
-              <a:rPr lang="en-US" sz="1200" i="1" dirty="0">
-                <a:solidFill>
-                  <a:srgbClr val="1C2833"/>
-                </a:solidFill>
-                <a:latin typeface="Arial" pitchFamily="34" charset="0"/>
-                <a:ea typeface="Arial" pitchFamily="34" charset="-122"/>
-                <a:cs typeface="Arial" pitchFamily="34" charset="-120"/>
-              </a:rPr>
-              <a:t>"Tomorrow — mid-module check + project topic."</a:t>
+              <a:t> — Wake · Body's natural alertness peak</a:t>
+            </a:r>
+            <a:endParaRPr lang="en-US" sz="1200" dirty="0"/>
+          </a:p>
+          <a:p>
+            <a:pPr algn="l" marL="342900" indent="-342900">
+              <a:lnSpc>
+                <a:spcPts val="1620"/>
+              </a:lnSpc>
+              <a:spcAft>
+                <a:spcPts val="300"/>
+              </a:spcAft>
+              <a:buSzPct val="100000"/>
+              <a:buChar char="•"/>
+            </a:pPr>
+            <a:r>
+              <a:rPr lang="en-US" sz="1200" b="1" dirty="0">
+                <a:solidFill>
+                  <a:srgbClr val="1C2833"/>
+                </a:solidFill>
+                <a:latin typeface="Arial" pitchFamily="34" charset="0"/>
+                <a:ea typeface="Arial" pitchFamily="34" charset="-122"/>
+                <a:cs typeface="Arial" pitchFamily="34" charset="-120"/>
+              </a:rPr>
+              <a:t>Just after waking</a:t>
+            </a:r>
+            <a:pPr algn="l" indent="0" marL="0">
+              <a:lnSpc>
+                <a:spcPts val="1620"/>
+              </a:lnSpc>
+              <a:spcAft>
+                <a:spcPts val="300"/>
+              </a:spcAft>
+              <a:buNone/>
+            </a:pPr>
+            <a:r>
+              <a:rPr lang="en-US" sz="1200" dirty="0">
+                <a:solidFill>
+                  <a:srgbClr val="1C2833"/>
+                </a:solidFill>
+                <a:latin typeface="Arial" pitchFamily="34" charset="0"/>
+                <a:ea typeface="Arial" pitchFamily="34" charset="-122"/>
+                <a:cs typeface="Arial" pitchFamily="34" charset="-120"/>
+              </a:rPr>
+              <a:t> — Drink warm water · Stimulates digestion, aids elimination</a:t>
+            </a:r>
+            <a:endParaRPr lang="en-US" sz="1200" dirty="0"/>
+          </a:p>
+          <a:p>
+            <a:pPr algn="l" marL="342900" indent="-342900">
+              <a:lnSpc>
+                <a:spcPts val="1620"/>
+              </a:lnSpc>
+              <a:spcAft>
+                <a:spcPts val="300"/>
+              </a:spcAft>
+              <a:buSzPct val="100000"/>
+              <a:buChar char="•"/>
+            </a:pPr>
+            <a:r>
+              <a:rPr lang="en-US" sz="1200" b="1" dirty="0">
+                <a:solidFill>
+                  <a:srgbClr val="1C2833"/>
+                </a:solidFill>
+                <a:latin typeface="Arial" pitchFamily="34" charset="0"/>
+                <a:ea typeface="Arial" pitchFamily="34" charset="-122"/>
+                <a:cs typeface="Arial" pitchFamily="34" charset="-120"/>
+              </a:rPr>
+              <a:t>Morning</a:t>
+            </a:r>
+            <a:pPr algn="l" indent="0" marL="0">
+              <a:lnSpc>
+                <a:spcPts val="1620"/>
+              </a:lnSpc>
+              <a:spcAft>
+                <a:spcPts val="300"/>
+              </a:spcAft>
+              <a:buNone/>
+            </a:pPr>
+            <a:r>
+              <a:rPr lang="en-US" sz="1200" dirty="0">
+                <a:solidFill>
+                  <a:srgbClr val="1C2833"/>
+                </a:solidFill>
+                <a:latin typeface="Arial" pitchFamily="34" charset="0"/>
+                <a:ea typeface="Arial" pitchFamily="34" charset="-122"/>
+                <a:cs typeface="Arial" pitchFamily="34" charset="-120"/>
+              </a:rPr>
+              <a:t> — Oral hygiene (tongue scraping, oil pulling) · Removes overnight buildup</a:t>
+            </a:r>
+            <a:endParaRPr lang="en-US" sz="1200" dirty="0"/>
+          </a:p>
+          <a:p>
+            <a:pPr algn="l" marL="342900" indent="-342900">
+              <a:lnSpc>
+                <a:spcPts val="1620"/>
+              </a:lnSpc>
+              <a:spcAft>
+                <a:spcPts val="300"/>
+              </a:spcAft>
+              <a:buSzPct val="100000"/>
+              <a:buChar char="•"/>
+            </a:pPr>
+            <a:r>
+              <a:rPr lang="en-US" sz="1200" b="1" dirty="0">
+                <a:solidFill>
+                  <a:srgbClr val="1C2833"/>
+                </a:solidFill>
+                <a:latin typeface="Arial" pitchFamily="34" charset="0"/>
+                <a:ea typeface="Arial" pitchFamily="34" charset="-122"/>
+                <a:cs typeface="Arial" pitchFamily="34" charset="-120"/>
+              </a:rPr>
+              <a:t>Pre-bath</a:t>
+            </a:r>
+            <a:pPr algn="l" indent="0" marL="0">
+              <a:lnSpc>
+                <a:spcPts val="1620"/>
+              </a:lnSpc>
+              <a:spcAft>
+                <a:spcPts val="300"/>
+              </a:spcAft>
+              <a:buNone/>
+            </a:pPr>
+            <a:r>
+              <a:rPr lang="en-US" sz="1200" dirty="0">
+                <a:solidFill>
+                  <a:srgbClr val="1C2833"/>
+                </a:solidFill>
+                <a:latin typeface="Arial" pitchFamily="34" charset="0"/>
+                <a:ea typeface="Arial" pitchFamily="34" charset="-122"/>
+                <a:cs typeface="Arial" pitchFamily="34" charset="-120"/>
+              </a:rPr>
+              <a:t> — Abhyanga (warm oil self-massage) · Calms Vāta; nourishes skin</a:t>
+            </a:r>
+            <a:endParaRPr lang="en-US" sz="1200" dirty="0"/>
+          </a:p>
+          <a:p>
+            <a:pPr algn="l" marL="342900" indent="-342900">
+              <a:lnSpc>
+                <a:spcPts val="1620"/>
+              </a:lnSpc>
+              <a:spcAft>
+                <a:spcPts val="300"/>
+              </a:spcAft>
+              <a:buSzPct val="100000"/>
+              <a:buChar char="•"/>
+            </a:pPr>
+            <a:r>
+              <a:rPr lang="en-US" sz="1200" b="1" dirty="0">
+                <a:solidFill>
+                  <a:srgbClr val="1C2833"/>
+                </a:solidFill>
+                <a:latin typeface="Arial" pitchFamily="34" charset="0"/>
+                <a:ea typeface="Arial" pitchFamily="34" charset="-122"/>
+                <a:cs typeface="Arial" pitchFamily="34" charset="-120"/>
+              </a:rPr>
+              <a:t>Morning</a:t>
+            </a:r>
+            <a:pPr algn="l" indent="0" marL="0">
+              <a:lnSpc>
+                <a:spcPts val="1620"/>
+              </a:lnSpc>
+              <a:spcAft>
+                <a:spcPts val="300"/>
+              </a:spcAft>
+              <a:buNone/>
+            </a:pPr>
+            <a:r>
+              <a:rPr lang="en-US" sz="1200" dirty="0">
+                <a:solidFill>
+                  <a:srgbClr val="1C2833"/>
+                </a:solidFill>
+                <a:latin typeface="Arial" pitchFamily="34" charset="0"/>
+                <a:ea typeface="Arial" pitchFamily="34" charset="-122"/>
+                <a:cs typeface="Arial" pitchFamily="34" charset="-120"/>
+              </a:rPr>
+              <a:t> — Exercise (vyāyāma) — up to 50% capacity · Builds Pitta; doesn't deplete</a:t>
+            </a:r>
+            <a:endParaRPr lang="en-US" sz="1200" dirty="0"/>
+          </a:p>
+          <a:p>
+            <a:pPr algn="l" marL="342900" indent="-342900">
+              <a:lnSpc>
+                <a:spcPts val="1620"/>
+              </a:lnSpc>
+              <a:spcAft>
+                <a:spcPts val="300"/>
+              </a:spcAft>
+              <a:buSzPct val="100000"/>
+              <a:buChar char="•"/>
+            </a:pPr>
+            <a:r>
+              <a:rPr lang="en-US" sz="1200" b="1" dirty="0">
+                <a:solidFill>
+                  <a:srgbClr val="1C2833"/>
+                </a:solidFill>
+                <a:latin typeface="Arial" pitchFamily="34" charset="0"/>
+                <a:ea typeface="Arial" pitchFamily="34" charset="-122"/>
+                <a:cs typeface="Arial" pitchFamily="34" charset="-120"/>
+              </a:rPr>
+              <a:t>Mid-morning</a:t>
+            </a:r>
+            <a:pPr algn="l" indent="0" marL="0">
+              <a:lnSpc>
+                <a:spcPts val="1620"/>
+              </a:lnSpc>
+              <a:spcAft>
+                <a:spcPts val="300"/>
+              </a:spcAft>
+              <a:buNone/>
+            </a:pPr>
+            <a:r>
+              <a:rPr lang="en-US" sz="1200" dirty="0">
+                <a:solidFill>
+                  <a:srgbClr val="1C2833"/>
+                </a:solidFill>
+                <a:latin typeface="Arial" pitchFamily="34" charset="0"/>
+                <a:ea typeface="Arial" pitchFamily="34" charset="-122"/>
+                <a:cs typeface="Arial" pitchFamily="34" charset="-120"/>
+              </a:rPr>
+              <a:t> — Largest meal of the day · Digestive fire (Pitta) is strongest</a:t>
             </a:r>
             <a:endParaRPr lang="en-US" sz="1200" dirty="0"/>
           </a:p>
@@ -4968,7 +7201,7 @@
                 <a:ea typeface="Georgia" pitchFamily="34" charset="-122"/>
                 <a:cs typeface="Georgia" pitchFamily="34" charset="-120"/>
               </a:rPr>
-              <a:t>Homework</a:t>
+              <a:t>Core (25 min) (cont.)</a:t>
             </a:r>
             <a:endParaRPr lang="en-US" sz="1800" dirty="0"/>
           </a:p>
@@ -4982,8 +7215,8 @@
         </p:nvSpPr>
         <p:spPr>
           <a:xfrm>
-            <a:off x="406301" y="870942"/>
-            <a:ext cx="8498026" cy="213271"/>
+            <a:off x="634901" y="883593"/>
+            <a:ext cx="8102798" cy="525661"/>
           </a:xfrm>
           <a:prstGeom prst="rect">
             <a:avLst/>
@@ -4995,13 +7228,31 @@
           <a:bodyPr wrap="square" lIns="0" tIns="0" rIns="0" bIns="0" rtlCol="0" anchor="t"/>
           <a:lstStyle/>
           <a:p>
-            <a:pPr algn="l" indent="0" marL="0">
-              <a:lnSpc>
-                <a:spcPts val="1680"/>
-              </a:lnSpc>
-              <a:spcBef>
-                <a:spcPts val="300"/>
-              </a:spcBef>
+            <a:pPr algn="l" marL="342900" indent="-342900">
+              <a:lnSpc>
+                <a:spcPts val="1620"/>
+              </a:lnSpc>
+              <a:spcAft>
+                <a:spcPts val="300"/>
+              </a:spcAft>
+              <a:buSzPct val="100000"/>
+              <a:buChar char="•"/>
+            </a:pPr>
+            <a:r>
+              <a:rPr lang="en-US" sz="1200" b="1" dirty="0">
+                <a:solidFill>
+                  <a:srgbClr val="1C2833"/>
+                </a:solidFill>
+                <a:latin typeface="Arial" pitchFamily="34" charset="0"/>
+                <a:ea typeface="Arial" pitchFamily="34" charset="-122"/>
+                <a:cs typeface="Arial" pitchFamily="34" charset="-120"/>
+              </a:rPr>
+              <a:t>Evening</a:t>
+            </a:r>
+            <a:pPr algn="l" indent="0" marL="0">
+              <a:lnSpc>
+                <a:spcPts val="1620"/>
+              </a:lnSpc>
               <a:spcAft>
                 <a:spcPts val="300"/>
               </a:spcAft>
@@ -5016,15 +7267,125 @@
                 <a:ea typeface="Arial" pitchFamily="34" charset="-122"/>
                 <a:cs typeface="Arial" pitchFamily="34" charset="-120"/>
               </a:rPr>
-              <a:t>– Pick ONE dinacharya practice you don't currently do. Try it tomorrow. Note how it felt.</a:t>
+              <a:t> — Light dinner, before sunset (ideally) · Aligns with digestive rhythm</a:t>
             </a:r>
             <a:endParaRPr lang="en-US" sz="1200" dirty="0"/>
           </a:p>
+          <a:p>
+            <a:pPr algn="l" marL="342900" indent="-342900">
+              <a:lnSpc>
+                <a:spcPts val="1620"/>
+              </a:lnSpc>
+              <a:spcAft>
+                <a:spcPts val="300"/>
+              </a:spcAft>
+              <a:buSzPct val="100000"/>
+              <a:buChar char="•"/>
+            </a:pPr>
+            <a:r>
+              <a:rPr lang="en-US" sz="1200" b="1" dirty="0">
+                <a:solidFill>
+                  <a:srgbClr val="1C2833"/>
+                </a:solidFill>
+                <a:latin typeface="Arial" pitchFamily="34" charset="0"/>
+                <a:ea typeface="Arial" pitchFamily="34" charset="-122"/>
+                <a:cs typeface="Arial" pitchFamily="34" charset="-120"/>
+              </a:rPr>
+              <a:t>Night</a:t>
+            </a:r>
+            <a:pPr algn="l" indent="0" marL="0">
+              <a:lnSpc>
+                <a:spcPts val="1620"/>
+              </a:lnSpc>
+              <a:spcAft>
+                <a:spcPts val="300"/>
+              </a:spcAft>
+              <a:buNone/>
+            </a:pPr>
+            <a:r>
+              <a:rPr lang="en-US" sz="1200" dirty="0">
+                <a:solidFill>
+                  <a:srgbClr val="1C2833"/>
+                </a:solidFill>
+                <a:latin typeface="Arial" pitchFamily="34" charset="0"/>
+                <a:ea typeface="Arial" pitchFamily="34" charset="-122"/>
+                <a:cs typeface="Arial" pitchFamily="34" charset="-120"/>
+              </a:rPr>
+              <a:t> — Sleep by 10pm · Aligns with Kapha→Pitta night cycle</a:t>
+            </a:r>
+            <a:endParaRPr lang="en-US" sz="1200" dirty="0"/>
+          </a:p>
         </p:txBody>
       </p:sp>
       <p:sp>
         <p:nvSpPr>
           <p:cNvPr id="5" name="Text 3"/>
+          <p:cNvSpPr/>
+          <p:nvPr/>
+        </p:nvSpPr>
+        <p:spPr>
+          <a:xfrm>
+            <a:off x="634901" y="1510754"/>
+            <a:ext cx="8102798" cy="487561"/>
+          </a:xfrm>
+          <a:prstGeom prst="rect">
+            <a:avLst/>
+          </a:prstGeom>
+          <a:noFill/>
+          <a:ln/>
+        </p:spPr>
+        <p:txBody>
+          <a:bodyPr wrap="square" lIns="0" tIns="0" rIns="0" bIns="0" rtlCol="0" anchor="t"/>
+          <a:lstStyle/>
+          <a:p>
+            <a:pPr algn="l" marL="342900" indent="-342900">
+              <a:lnSpc>
+                <a:spcPts val="1620"/>
+              </a:lnSpc>
+              <a:spcAft>
+                <a:spcPts val="300"/>
+              </a:spcAft>
+              <a:buSzPct val="100000"/>
+              <a:buChar char="•"/>
+            </a:pPr>
+            <a:r>
+              <a:rPr lang="en-US" sz="1200" b="1" dirty="0">
+                <a:solidFill>
+                  <a:srgbClr val="1C2833"/>
+                </a:solidFill>
+                <a:latin typeface="Arial" pitchFamily="34" charset="0"/>
+                <a:ea typeface="Arial" pitchFamily="34" charset="-122"/>
+                <a:cs typeface="Arial" pitchFamily="34" charset="-120"/>
+              </a:rPr>
+              <a:t>The principle:</a:t>
+            </a:r>
+            <a:pPr algn="l" indent="0" marL="0">
+              <a:lnSpc>
+                <a:spcPts val="1620"/>
+              </a:lnSpc>
+              <a:spcAft>
+                <a:spcPts val="300"/>
+              </a:spcAft>
+              <a:buNone/>
+            </a:pPr>
+            <a:r>
+              <a:rPr lang="en-US" sz="1200" dirty="0">
+                <a:solidFill>
+                  <a:srgbClr val="1C2833"/>
+                </a:solidFill>
+                <a:latin typeface="Arial" pitchFamily="34" charset="0"/>
+                <a:ea typeface="Arial" pitchFamily="34" charset="-122"/>
+                <a:cs typeface="Arial" pitchFamily="34" charset="-120"/>
+              </a:rPr>
+              <a:t> the day is divided into Kapha (6am–10am), Pitta (10am–2pm), Vāta (2pm–6pm), then repeating. Each time block has dominant dosha character. Activities aligned with the block work with the body, not against it.</a:t>
+            </a:r>
+            <a:endParaRPr lang="en-US" sz="1200" dirty="0"/>
+          </a:p>
+        </p:txBody>
+      </p:sp>
+      <p:sp>
+        <p:nvSpPr>
+          <p:cNvPr id="6" name="Text 4"/>
           <p:cNvSpPr/>
           <p:nvPr/>
         </p:nvSpPr>
